--- a/en/slides/02-Computer_Architecture-First_Contact_with_RISC-V_Assembly-Code.pptx
+++ b/en/slides/02-Computer_Architecture-First_Contact_with_RISC-V_Assembly-Code.pptx
@@ -122,13 +122,13 @@
   <p:extLst>
     <p:ext uri="{521415D9-36F7-43E2-AB2F-B90AF26B5E84}">
       <p14:sectionLst xmlns:p14="http://schemas.microsoft.com/office/powerpoint/2010/main">
-        <p14:section name="Opening" id="{a2ec31e5-ab8e-eccd-edb0-b3d2b2c628b0}">
+        <p14:section name="Opening" id="{11d71aae-6859-6a37-e22c-d8643cc1e307}">
           <p14:sldIdLst>
             <p14:sldId id="256"/>
             <p14:sldId id="257"/>
           </p14:sldIdLst>
         </p14:section>
-        <p14:section name="The listings" id="{e196ea9e-97bd-5c37-8e36-7bb9d2166d77}">
+        <p14:section name="Your first cartridge" id="{f6f1cd96-c3f2-178f-f0f7-9475c82b5751}">
           <p14:sldIdLst>
             <p14:sldId id="258"/>
             <p14:sldId id="259"/>
@@ -137,14 +137,14 @@
             <p14:sldId id="262"/>
           </p14:sldIdLst>
         </p14:section>
-        <p14:section name="The complete program" id="{d2bee988-9200-c39e-f952-73f59aa6ead3}">
+        <p14:section name="The complete program" id="{4d88dc32-5e25-73d6-2cf5-5f1f0502433a}">
           <p14:sldIdLst>
             <p14:sldId id="263"/>
             <p14:sldId id="264"/>
             <p14:sldId id="265"/>
           </p14:sldIdLst>
         </p14:section>
-        <p14:section name="Run it and test it" id="{22d65739-a2cb-5f73-0ce6-cfa3f357c000}">
+        <p14:section name="Run it and test it" id="{b5ae4457-0610-d365-aabc-94a8960e91ba}">
           <p14:sldIdLst>
             <p14:sldId id="266"/>
             <p14:sldId id="267"/>
@@ -153,7 +153,7 @@
             <p14:sldId id="270"/>
           </p14:sldIdLst>
         </p14:section>
-        <p14:section name="Exercises" id="{2cd49a21-800f-29dd-a757-f0e258b4897d}">
+        <p14:section name="Exercises" id="{926d5e7e-f51a-40ae-37c4-6d102312a7c1}">
           <p14:sldIdLst>
             <p14:sldId id="271"/>
           </p14:sldIdLst>
@@ -2751,7 +2751,7 @@
                 <a:ea typeface="Cambria" pitchFamily="34" charset="-122"/>
                 <a:cs typeface="Cambria" pitchFamily="34" charset="-120"/>
               </a:rPr>
-              <a:t>First Contact: RISC-V Assembly on PRG32: the code</a:t>
+              <a:t>First Contact: RISC‑V Assembly on PRG32: the code</a:t>
             </a:r>
             <a:endParaRPr lang="en-US" sz="4800" dirty="0"/>
           </a:p>
@@ -2871,7 +2871,63 @@
       </p:sp>
       <p:sp>
         <p:nvSpPr>
-          <p:cNvPr id="11" name="Shape 9"/>
+          <p:cNvPr id="11" name="Text 9"/>
+          <p:cNvSpPr txBox="1"/>
+          <p:nvPr/>
+        </p:nvSpPr>
+        <p:spPr>
+          <a:xfrm>
+            <a:off x="4693615" y="566928"/>
+            <a:ext cx="6949440" cy="640080"/>
+          </a:xfrm>
+          <a:prstGeom prst="rect">
+            <a:avLst/>
+          </a:prstGeom>
+          <a:noFill/>
+          <a:ln/>
+        </p:spPr>
+        <p:txBody>
+          <a:bodyPr wrap="square" lIns="0" tIns="0" rIns="0" bIns="0" rtlCol="0" anchor="t"/>
+          <a:lstStyle/>
+          <a:p>
+            <a:pPr algn="r" indent="0" marL="0">
+              <a:buNone/>
+            </a:pPr>
+            <a:r>
+              <a:rPr lang="en-US" sz="1300" dirty="0">
+                <a:solidFill>
+                  <a:srgbClr val="CFE3EA"/>
+                </a:solidFill>
+                <a:latin typeface="Calibri" pitchFamily="34" charset="0"/>
+                <a:ea typeface="Calibri" pitchFamily="34" charset="-122"/>
+                <a:cs typeface="Calibri" pitchFamily="34" charset="-120"/>
+              </a:rPr>
+              <a:t>Code deck. The concepts, the figures and the questions are in the lecture deck:</a:t>
+            </a:r>
+            <a:endParaRPr lang="en-US" sz="1300" dirty="0"/>
+          </a:p>
+          <a:p>
+            <a:pPr algn="r" indent="0" marL="0">
+              <a:buNone/>
+            </a:pPr>
+            <a:r>
+              <a:rPr lang="en-US" sz="1300" dirty="0">
+                <a:solidFill>
+                  <a:srgbClr val="CFE3EA"/>
+                </a:solidFill>
+                <a:latin typeface="Calibri" pitchFamily="34" charset="0"/>
+                <a:ea typeface="Calibri" pitchFamily="34" charset="-122"/>
+                <a:cs typeface="Calibri" pitchFamily="34" charset="-120"/>
+              </a:rPr>
+              <a:t>02-Computer_Architecture-First_Contact_with_RISC-V_Assembly.pptx</a:t>
+            </a:r>
+            <a:endParaRPr lang="en-US" sz="1300" dirty="0"/>
+          </a:p>
+        </p:txBody>
+      </p:sp>
+      <p:sp>
+        <p:nvSpPr>
+          <p:cNvPr id="12" name="Shape 10"/>
           <p:cNvSpPr/>
           <p:nvPr/>
         </p:nvSpPr>
@@ -2898,7 +2954,7 @@
       </p:sp>
       <p:pic>
         <p:nvPicPr>
-          <p:cNvPr id="12" name="Image 0" descr="/Users/raffaelemontella/devel/riscv-prg32/computer-architecture-with-prg32/tools/assets/lab1_step4_bar.png">    </p:cNvPr>
+          <p:cNvPr id="13" name="Image 0" descr="/Users/raffaelemontella/devel/riscv-prg32/computer-architecture-with-prg32/tools/assets/lab1_step4_bar.png">    </p:cNvPr>
           <p:cNvPicPr>
             <a:picLocks noChangeAspect="1"/>
           </p:cNvPicPr>

--- a/en/slides/02-Computer_Architecture-First_Contact_with_RISC-V_Assembly-Code.pptx
+++ b/en/slides/02-Computer_Architecture-First_Contact_with_RISC-V_Assembly-Code.pptx
@@ -122,13 +122,13 @@
   <p:extLst>
     <p:ext uri="{521415D9-36F7-43E2-AB2F-B90AF26B5E84}">
       <p14:sectionLst xmlns:p14="http://schemas.microsoft.com/office/powerpoint/2010/main">
-        <p14:section name="Opening" id="{11d71aae-6859-6a37-e22c-d8643cc1e307}">
+        <p14:section name="Opening" id="{61a5aaac-a85b-c97b-b4e9-3c72e2d2cc2d}">
           <p14:sldIdLst>
             <p14:sldId id="256"/>
             <p14:sldId id="257"/>
           </p14:sldIdLst>
         </p14:section>
-        <p14:section name="Your first cartridge" id="{f6f1cd96-c3f2-178f-f0f7-9475c82b5751}">
+        <p14:section name="Your first cartridge" id="{e64e2bbb-0d49-49dd-15a9-b07832f80456}">
           <p14:sldIdLst>
             <p14:sldId id="258"/>
             <p14:sldId id="259"/>
@@ -137,14 +137,14 @@
             <p14:sldId id="262"/>
           </p14:sldIdLst>
         </p14:section>
-        <p14:section name="The complete program" id="{4d88dc32-5e25-73d6-2cf5-5f1f0502433a}">
+        <p14:section name="The complete program" id="{ef79cb22-d387-df12-4681-28cb9eff6690}">
           <p14:sldIdLst>
             <p14:sldId id="263"/>
             <p14:sldId id="264"/>
             <p14:sldId id="265"/>
           </p14:sldIdLst>
         </p14:section>
-        <p14:section name="Run it and test it" id="{b5ae4457-0610-d365-aabc-94a8960e91ba}">
+        <p14:section name="Run it and test it" id="{bfb4ab95-bb89-6d79-876c-a4d04002b132}">
           <p14:sldIdLst>
             <p14:sldId id="266"/>
             <p14:sldId id="267"/>
@@ -153,7 +153,7 @@
             <p14:sldId id="270"/>
           </p14:sldIdLst>
         </p14:section>
-        <p14:section name="Exercises" id="{926d5e7e-f51a-40ae-37c4-6d102312a7c1}">
+        <p14:section name="Exercises" id="{42465f99-28cf-102d-0984-daaaa7a17c67}">
           <p14:sldIdLst>
             <p14:sldId id="271"/>
           </p14:sldIdLst>
@@ -562,7 +562,9 @@
           <a:p>
             <a:r>
               <a:rPr lang="en-US" dirty="0"/>
-              <a:t>This is the code deck of Lecture 02. The lecture deck holds the concepts; this one holds everything you type and run: the listings with their explanation, the complete program, what it shows, and the way to test it on each of the three hosts.</a:t>
+              <a:t>This is the code deck of Lecture 02. The lecture deck holds the concepts; this one holds everything you type and run: the listings with their explanation, the complete program, what it shows, and the way to test it on each of the three hosts.
+Learning status: UNDERSTAND NOW, by the end of this lecture you explain it, trace it and apply it on your own; USE NOW, you follow and use the recipe today; how it works inside is explained later, or is not part of the course; UNDERSTAND LATER, recognise the name and what it is for; a later lecture explains it. A slide without a badge is context: a story, an example, a question, an exercise.
+Learning status of this lecture. UNDERSTAND NOW: registers, compute, move, jump; registers; the init, update, draw contract; arguments in a0 to a7; why ra is saved; address, value, load, store; the base instructions; pseudo-instructions; an instruction is a number; tracing by hand. USE NOW: the calling convention (Lecture 18); bit masks (Lecture 08) and, used without being studied in this course, the assembler directives, the PRG32 tools, the PRG32 runtime calls, the PRG32-QT debugger, the complete program. UNDERSTAND LATER: the stack (Lecture 18); addressing modes (Lecture 19); instruction formats (Lecture 19); hexadecimal (Lecture 04); two's complement (Lecture 05); fixed point (Lecture 06); Boolean algebra (Lecture 08); the adder (Lecture 09); from volts to bits (Lecture 10); latches and flip-flops (Lecture 13); the processor cycle (Lecture 19); the Verm1 project (Lecture 07). A slide without a badge is context: a story, an example, a question, an exercise.</a:t>
             </a:r>
             <a:endParaRPr lang="en-US" dirty="0"/>
           </a:p>
@@ -651,6 +653,7 @@
             <a:r>
               <a:rPr lang="en-US" dirty="0"/>
               <a:t>One page of the complete program, exactly as it is in the repository. Read it from the top: the header says what the program shows and how to build it; the three functions init, update and draw follow, then the data. Lines that you met in the listings of the lecture have the same comments here.
+USE NOW: the complete program (used, not studied, in this course).
 For the lecturer: code/l02.S, as built and run by the tests. The comments are part of the program: read them with the code.</a:t>
             </a:r>
             <a:endParaRPr lang="en-US" dirty="0"/>
@@ -829,6 +832,7 @@
             <a:r>
               <a:rPr lang="en-US" dirty="0"/>
               <a:t>The quickest way: PRG32-QT on your own computer. Four steps, each with its command. PRG32-QT behaves like a board on port 8080, which is why the upload command says esp32c6. With debug mode enabled you can stop at any instruction and read registers and memory.
+USE NOW: the PRG32 tools (used, not studied, in this course).
 For the lecturer: Run by the tests: the cartridge of this slide is built with this command and executed on the headless runner of PRG32-QT. Without the toolchain: import the .prg32 file in PRG32-QT and choose Run Cartridge. Keys: arrows or WASD for the joystick, Z or J for A, X or K for B, Enter for Start, Escape to go back to Setup.</a:t>
             </a:r>
             <a:endParaRPr lang="en-US" dirty="0"/>
@@ -918,6 +922,7 @@
             <a:r>
               <a:rPr lang="en-US" dirty="0"/>
               <a:t>The same program on the emulator. QEMU runs the real firmware on an emulated chip, so the cartridge must be built for the architecture qemu. Stage the cartridge while QEMU is closed. The firmware opens on the Setup menu: choose Run Cartridge and the slot. Remember that the keyboard is read by the terminal, not by the window with the picture.
+USE NOW: the PRG32 tools (used, not studied, in this course).
 For the lecturer: Checked by the tests up to the staging: the cartridge is built for the architecture qemu and accepted into the flash image of the emulator. What the emulator then shows is not checked automatically: Espressif QEMU needs its window. Since October 2026 the firmware starts on Setup: choose Run Cartridge, then cart0.</a:t>
             </a:r>
             <a:endParaRPr lang="en-US" dirty="0"/>
@@ -1007,6 +1012,7 @@
             <a:r>
               <a:rPr lang="en-US" dirty="0"/>
               <a:t>The same program on the kit. The firmware is written once, through USB; after that cartridges travel over Wi-Fi. The upload command is the one used for PRG32-QT with the address of the board. This is the only host that the automatic tests do not run: try it, and report what you see.
+USE NOW: the PRG32 tools (used, not studied, in this course).
 For the lecturer: Not run by the tests: there is no board on the test machine. The cartridge for the architecture esp32c6 is built by the tests; the steps are those of the PRG32 documentation. If the serial port is not found pass it explicitly. To use the Wi-Fi of the classroom: python3 -m prg32 wifi set --ssid NAME --password PASSWORD --mode sta.</a:t>
             </a:r>
             <a:endParaRPr lang="en-US" dirty="0"/>
@@ -1096,6 +1102,7 @@
             <a:r>
               <a:rPr lang="en-US" dirty="0"/>
               <a:t>The five most common symptoms, what each means, and what to do. Read the message before changing anything: it nearly always names the cause.
+USE NOW: the PRG32 tools (used, not studied, in this course).
 For the lecturer: The first three rows cover most cases. When asking for help, paste the command and the whole message as text. docs/usage/troubleshooting.md of the PRG32 repository has the complete list.</a:t>
             </a:r>
             <a:endParaRPr lang="en-US" dirty="0"/>
@@ -1363,6 +1370,7 @@
             <a:r>
               <a:rPr lang="en-US" dirty="0"/>
               <a:t>The smallest program that runs. .option norelax is a line with which every PRG32 example starts: it keeps the layout of the cartridge predictable. .section .text says that code follows. Each .global makes a label visible outside the file, so that the firmware can find the function by name. Then three functions, each made of the single instruction ret, which returns to the caller. The result is a black screen, and it is a success: the framework found your three functions, called them, and got control back.
+USE NOW: the assembler directives (used, not studied, in this course).
 For the lecturer: Source: labs/05-asm-first-contact/step1_skeleton.S. Expected result: a black screen. The achievement is that the framework found the three functions, called them, and survived.</a:t>
             </a:r>
             <a:endParaRPr lang="en-US" dirty="0"/>
@@ -1452,6 +1460,7 @@
             <a:r>
               <a:rPr lang="en-US" dirty="0"/>
               <a:t>Two commands that you will type hundreds of times. cartridge build turns the assembly file into a cartridge: --entry-prefix first is the prefix of your three functions, --out the name of the result. Then you run it: in QEMU with qemu upload and qemu run, or on a board or PRG32-QT with upload-and-run and the address of the host. For PRG32-QT on your own laptop the address is http://localhost:8080. The cartridge file is the same for all three.
+USE NOW: the PRG32 tools (used, not studied, in this course).
 For the lecturer: Source: labs/run.sh. With PRG32_HOME set, the whole sequence is: labs/run.sh 05-asm-first-contact/step1_skeleton.S first . The cartridge file is byte-for-byte the same for QEMU, the board and PRG32-QT.</a:t>
             </a:r>
             <a:endParaRPr lang="en-US" dirty="0"/>
@@ -1541,6 +1550,7 @@
             <a:r>
               <a:rPr lang="en-US" dirty="0"/>
               <a:t>The second step writes on the screen. Read first_draw in three parts. The first two lines make room on the stack and save ra. Then two calls: prg32_gfx_clear with the colour in a0, and prg32_gfx_text8 with five arguments in a0 to a4: x, y, the address of the string, foreground, background. Note the two ways of loading: li loads a number, la loads the address of a label. The last three lines restore ra, release the stack and return. The string itself is data, in the section .rodata.
+UNDERSTAND NOW: arguments in a0 to a7. USE NOW: the PRG32 runtime calls (used, not studied, in this course).
 For the lecturer: Source: labs/05-asm-first-contact/step2_hello.S. The .equ lines (BLACK 0x0000, WHITE 0xffff) are omitted on the slide.</a:t>
             </a:r>
             <a:endParaRPr lang="en-US" dirty="0"/>
@@ -1630,6 +1640,7 @@
             <a:r>
               <a:rPr lang="en-US" dirty="0"/>
               <a:t>The third step keeps a value from one frame to the next. Registers do not survive between calls of update, so the value must live in memory. counter is a label: it names a location in the section .data that holds one word. The four instructions are the pattern of every variable: la puts the address of the location in t0; lw loads the value into t1; addi changes it; sw stores it back. Load, modify, store. Nothing changes on the screen yet: the counter ticks, but nobody draws it.
+UNDERSTAND NOW: address, value, load, store.
 For the lecturer: Source: labs/05-asm-first-contact/step3_counter.S. Nothing visible changes yet: the counter ticks but nobody draws it. Ask the class how they could prove that it is ticking (answer: the debugger of PRG32-QT, or the next step).</a:t>
             </a:r>
             <a:endParaRPr lang="en-US" dirty="0"/>
@@ -1719,6 +1730,7 @@
             <a:r>
               <a:rPr lang="en-US" dirty="0"/>
               <a:t>The fourth step makes the counter visible as a green bar. The value is loaded, and andi a2, t1, 255 keeps only its low eight bits, so the width goes from 0 to 255 and then starts again. The other registers are the arguments of prg32_gfx_rect: x, y, width, height and colour. Eight lines, and three later lectures are hidden in them: 255 written as 0xFF, andi used as a mask, and 0x07e0 that means green. Remember where you first saw them.
+USE NOW: bit masks (studied in Lecture 08).
 For the lecturer: Source: labs/05-asm-first-contact/step4_bar.S (the lines added to first_draw). Three future lectures hide in these eight lines: 255 = 0xFF (positional notation), andi as a bit mask (Boolean algebra), 0x07e0 as a colour (information encoding).</a:t>
             </a:r>
             <a:endParaRPr lang="en-US" dirty="0"/>
@@ -1808,6 +1820,7 @@
             <a:r>
               <a:rPr lang="en-US" dirty="0"/>
               <a:t>One page of the complete program, exactly as it is in the repository. Read it from the top: the header says what the program shows and how to build it; the three functions init, update and draw follow, then the data. Lines that you met in the listings of the lecture have the same comments here.
+USE NOW: the complete program (used, not studied, in this course).
 For the lecturer: code/l02.S, as built and run by the tests. The comments are part of the program: read them with the code.</a:t>
             </a:r>
             <a:endParaRPr lang="en-US" dirty="0"/>
@@ -1897,6 +1910,7 @@
             <a:r>
               <a:rPr lang="en-US" dirty="0"/>
               <a:t>One page of the complete program, exactly as it is in the repository. Read it from the top: the header says what the program shows and how to build it; the three functions init, update and draw follow, then the data. Lines that you met in the listings of the lecture have the same comments here.
+USE NOW: the complete program (used, not studied, in this course).
 For the lecturer: code/l02.S, as built and run by the tests. The comments are part of the program: read them with the code.</a:t>
             </a:r>
             <a:endParaRPr lang="en-US" dirty="0"/>
@@ -2978,6 +2992,420 @@
       </p:pic>
       <p:sp>
         <p:nvSpPr>
+          <p:cNvPr id="14" name="Shape 11"/>
+          <p:cNvSpPr/>
+          <p:nvPr/>
+        </p:nvSpPr>
+        <p:spPr>
+          <a:xfrm>
+            <a:off x="9690303" y="91440"/>
+            <a:ext cx="1952752" cy="274320"/>
+          </a:xfrm>
+          <a:prstGeom prst="rect">
+            <a:avLst/>
+          </a:prstGeom>
+          <a:solidFill>
+            <a:srgbClr val="F3E8FF"/>
+          </a:solidFill>
+          <a:ln w="12700">
+            <a:solidFill>
+              <a:srgbClr val="7E22CE"/>
+            </a:solidFill>
+            <a:prstDash val="dash"/>
+          </a:ln>
+        </p:spPr>
+      </p:sp>
+      <p:sp>
+        <p:nvSpPr>
+          <p:cNvPr id="15" name="Shape 12"/>
+          <p:cNvSpPr/>
+          <p:nvPr/>
+        </p:nvSpPr>
+        <p:spPr>
+          <a:xfrm>
+            <a:off x="9717735" y="128016"/>
+            <a:ext cx="45720" cy="45720"/>
+          </a:xfrm>
+          <a:prstGeom prst="rect">
+            <a:avLst/>
+          </a:prstGeom>
+          <a:solidFill>
+            <a:srgbClr val="7E22CE"/>
+          </a:solidFill>
+          <a:ln w="12700">
+            <a:solidFill>
+              <a:srgbClr val="7E22CE"/>
+            </a:solidFill>
+            <a:prstDash val="solid"/>
+          </a:ln>
+        </p:spPr>
+      </p:sp>
+      <p:sp>
+        <p:nvSpPr>
+          <p:cNvPr id="16" name="Shape 13"/>
+          <p:cNvSpPr/>
+          <p:nvPr/>
+        </p:nvSpPr>
+        <p:spPr>
+          <a:xfrm>
+            <a:off x="9717735" y="205740"/>
+            <a:ext cx="45720" cy="45720"/>
+          </a:xfrm>
+          <a:prstGeom prst="rect">
+            <a:avLst/>
+          </a:prstGeom>
+          <a:solidFill>
+            <a:srgbClr val="7E22CE"/>
+          </a:solidFill>
+          <a:ln w="12700">
+            <a:solidFill>
+              <a:srgbClr val="7E22CE"/>
+            </a:solidFill>
+            <a:prstDash val="solid"/>
+          </a:ln>
+        </p:spPr>
+      </p:sp>
+      <p:sp>
+        <p:nvSpPr>
+          <p:cNvPr id="17" name="Shape 14"/>
+          <p:cNvSpPr/>
+          <p:nvPr/>
+        </p:nvSpPr>
+        <p:spPr>
+          <a:xfrm>
+            <a:off x="9717735" y="283464"/>
+            <a:ext cx="45720" cy="45720"/>
+          </a:xfrm>
+          <a:prstGeom prst="rect">
+            <a:avLst/>
+          </a:prstGeom>
+          <a:solidFill>
+            <a:srgbClr val="7E22CE"/>
+          </a:solidFill>
+          <a:ln w="12700">
+            <a:solidFill>
+              <a:srgbClr val="7E22CE"/>
+            </a:solidFill>
+            <a:prstDash val="solid"/>
+          </a:ln>
+        </p:spPr>
+      </p:sp>
+      <p:pic>
+        <p:nvPicPr>
+          <p:cNvPr id="18" name="Image 1" descr="preencoded.png">    </p:cNvPr>
+          <p:cNvPicPr>
+            <a:picLocks noChangeAspect="1"/>
+          </p:cNvPicPr>
+          <p:nvPr/>
+        </p:nvPicPr>
+        <p:blipFill>
+          <a:blip r:embed="rId2"/>
+          <a:stretch>
+            <a:fillRect/>
+          </a:stretch>
+        </p:blipFill>
+        <p:spPr>
+          <a:xfrm>
+            <a:off x="9818319" y="128016"/>
+            <a:ext cx="201168" cy="201168"/>
+          </a:xfrm>
+          <a:prstGeom prst="rect">
+            <a:avLst/>
+          </a:prstGeom>
+        </p:spPr>
+      </p:pic>
+      <p:sp>
+        <p:nvSpPr>
+          <p:cNvPr id="19" name="Text 15"/>
+          <p:cNvSpPr txBox="1"/>
+          <p:nvPr/>
+        </p:nvSpPr>
+        <p:spPr>
+          <a:xfrm>
+            <a:off x="10074351" y="91440"/>
+            <a:ext cx="1532128" cy="274320"/>
+          </a:xfrm>
+          <a:prstGeom prst="rect">
+            <a:avLst/>
+          </a:prstGeom>
+          <a:noFill/>
+          <a:ln/>
+        </p:spPr>
+        <p:txBody>
+          <a:bodyPr wrap="square" lIns="0" tIns="0" rIns="0" bIns="0" rtlCol="0" anchor="ctr"/>
+          <a:lstStyle/>
+          <a:p>
+            <a:pPr indent="0" marL="0">
+              <a:buNone/>
+            </a:pPr>
+            <a:r>
+              <a:rPr lang="en-US" sz="1100" b="1" dirty="0">
+                <a:solidFill>
+                  <a:srgbClr val="6B21A8"/>
+                </a:solidFill>
+                <a:latin typeface="Calibri" pitchFamily="34" charset="0"/>
+                <a:ea typeface="Calibri" pitchFamily="34" charset="-122"/>
+                <a:cs typeface="Calibri" pitchFamily="34" charset="-120"/>
+              </a:rPr>
+              <a:t>UNDERSTAND LATER</a:t>
+            </a:r>
+            <a:endParaRPr lang="en-US" sz="1100" dirty="0"/>
+          </a:p>
+        </p:txBody>
+      </p:sp>
+      <p:sp>
+        <p:nvSpPr>
+          <p:cNvPr id="20" name="Shape 16"/>
+          <p:cNvSpPr/>
+          <p:nvPr/>
+        </p:nvSpPr>
+        <p:spPr>
+          <a:xfrm>
+            <a:off x="8407349" y="91440"/>
+            <a:ext cx="1173226" cy="274320"/>
+          </a:xfrm>
+          <a:prstGeom prst="rect">
+            <a:avLst/>
+          </a:prstGeom>
+          <a:solidFill>
+            <a:srgbClr val="FEF3C7"/>
+          </a:solidFill>
+          <a:ln w="12700">
+            <a:solidFill>
+              <a:srgbClr val="B45309"/>
+            </a:solidFill>
+            <a:prstDash val="solid"/>
+          </a:ln>
+        </p:spPr>
+      </p:sp>
+      <p:sp>
+        <p:nvSpPr>
+          <p:cNvPr id="21" name="Shape 17"/>
+          <p:cNvSpPr/>
+          <p:nvPr/>
+        </p:nvSpPr>
+        <p:spPr>
+          <a:xfrm>
+            <a:off x="8407349" y="91440"/>
+            <a:ext cx="27432" cy="274320"/>
+          </a:xfrm>
+          <a:prstGeom prst="rect">
+            <a:avLst/>
+          </a:prstGeom>
+          <a:solidFill>
+            <a:srgbClr val="B45309"/>
+          </a:solidFill>
+          <a:ln w="12700">
+            <a:solidFill>
+              <a:srgbClr val="B45309"/>
+            </a:solidFill>
+            <a:prstDash val="solid"/>
+          </a:ln>
+        </p:spPr>
+      </p:sp>
+      <p:sp>
+        <p:nvSpPr>
+          <p:cNvPr id="22" name="Shape 18"/>
+          <p:cNvSpPr/>
+          <p:nvPr/>
+        </p:nvSpPr>
+        <p:spPr>
+          <a:xfrm>
+            <a:off x="8462213" y="91440"/>
+            <a:ext cx="27432" cy="274320"/>
+          </a:xfrm>
+          <a:prstGeom prst="rect">
+            <a:avLst/>
+          </a:prstGeom>
+          <a:solidFill>
+            <a:srgbClr val="B45309"/>
+          </a:solidFill>
+          <a:ln w="12700">
+            <a:solidFill>
+              <a:srgbClr val="B45309"/>
+            </a:solidFill>
+            <a:prstDash val="solid"/>
+          </a:ln>
+        </p:spPr>
+      </p:sp>
+      <p:pic>
+        <p:nvPicPr>
+          <p:cNvPr id="23" name="Image 2" descr="preencoded.png">    </p:cNvPr>
+          <p:cNvPicPr>
+            <a:picLocks noChangeAspect="1"/>
+          </p:cNvPicPr>
+          <p:nvPr/>
+        </p:nvPicPr>
+        <p:blipFill>
+          <a:blip r:embed="rId3"/>
+          <a:stretch>
+            <a:fillRect/>
+          </a:stretch>
+        </p:blipFill>
+        <p:spPr>
+          <a:xfrm>
+            <a:off x="8535365" y="128016"/>
+            <a:ext cx="201168" cy="201168"/>
+          </a:xfrm>
+          <a:prstGeom prst="rect">
+            <a:avLst/>
+          </a:prstGeom>
+        </p:spPr>
+      </p:pic>
+      <p:sp>
+        <p:nvSpPr>
+          <p:cNvPr id="24" name="Text 19"/>
+          <p:cNvSpPr txBox="1"/>
+          <p:nvPr/>
+        </p:nvSpPr>
+        <p:spPr>
+          <a:xfrm>
+            <a:off x="8791397" y="91440"/>
+            <a:ext cx="752602" cy="274320"/>
+          </a:xfrm>
+          <a:prstGeom prst="rect">
+            <a:avLst/>
+          </a:prstGeom>
+          <a:noFill/>
+          <a:ln/>
+        </p:spPr>
+        <p:txBody>
+          <a:bodyPr wrap="square" lIns="0" tIns="0" rIns="0" bIns="0" rtlCol="0" anchor="ctr"/>
+          <a:lstStyle/>
+          <a:p>
+            <a:pPr indent="0" marL="0">
+              <a:buNone/>
+            </a:pPr>
+            <a:r>
+              <a:rPr lang="en-US" sz="1100" b="1" dirty="0">
+                <a:solidFill>
+                  <a:srgbClr val="92400E"/>
+                </a:solidFill>
+                <a:latin typeface="Calibri" pitchFamily="34" charset="0"/>
+                <a:ea typeface="Calibri" pitchFamily="34" charset="-122"/>
+                <a:cs typeface="Calibri" pitchFamily="34" charset="-120"/>
+              </a:rPr>
+              <a:t>USE NOW</a:t>
+            </a:r>
+            <a:endParaRPr lang="en-US" sz="1100" dirty="0"/>
+          </a:p>
+        </p:txBody>
+      </p:sp>
+      <p:sp>
+        <p:nvSpPr>
+          <p:cNvPr id="25" name="Shape 20"/>
+          <p:cNvSpPr/>
+          <p:nvPr/>
+        </p:nvSpPr>
+        <p:spPr>
+          <a:xfrm>
+            <a:off x="6518097" y="91440"/>
+            <a:ext cx="1779524" cy="274320"/>
+          </a:xfrm>
+          <a:prstGeom prst="rect">
+            <a:avLst/>
+          </a:prstGeom>
+          <a:solidFill>
+            <a:srgbClr val="E0F2FE"/>
+          </a:solidFill>
+          <a:ln w="12700">
+            <a:solidFill>
+              <a:srgbClr val="0369A1"/>
+            </a:solidFill>
+            <a:prstDash val="solid"/>
+          </a:ln>
+        </p:spPr>
+      </p:sp>
+      <p:sp>
+        <p:nvSpPr>
+          <p:cNvPr id="26" name="Shape 21"/>
+          <p:cNvSpPr/>
+          <p:nvPr/>
+        </p:nvSpPr>
+        <p:spPr>
+          <a:xfrm>
+            <a:off x="6518097" y="91440"/>
+            <a:ext cx="73152" cy="274320"/>
+          </a:xfrm>
+          <a:prstGeom prst="rect">
+            <a:avLst/>
+          </a:prstGeom>
+          <a:solidFill>
+            <a:srgbClr val="0369A1"/>
+          </a:solidFill>
+          <a:ln w="12700">
+            <a:solidFill>
+              <a:srgbClr val="0369A1"/>
+            </a:solidFill>
+            <a:prstDash val="solid"/>
+          </a:ln>
+        </p:spPr>
+      </p:sp>
+      <p:pic>
+        <p:nvPicPr>
+          <p:cNvPr id="27" name="Image 3" descr="preencoded.png">    </p:cNvPr>
+          <p:cNvPicPr>
+            <a:picLocks noChangeAspect="1"/>
+          </p:cNvPicPr>
+          <p:nvPr/>
+        </p:nvPicPr>
+        <p:blipFill>
+          <a:blip r:embed="rId4"/>
+          <a:stretch>
+            <a:fillRect/>
+          </a:stretch>
+        </p:blipFill>
+        <p:spPr>
+          <a:xfrm>
+            <a:off x="6646113" y="128016"/>
+            <a:ext cx="201168" cy="201168"/>
+          </a:xfrm>
+          <a:prstGeom prst="rect">
+            <a:avLst/>
+          </a:prstGeom>
+        </p:spPr>
+      </p:pic>
+      <p:sp>
+        <p:nvSpPr>
+          <p:cNvPr id="28" name="Text 22"/>
+          <p:cNvSpPr txBox="1"/>
+          <p:nvPr/>
+        </p:nvSpPr>
+        <p:spPr>
+          <a:xfrm>
+            <a:off x="6902145" y="91440"/>
+            <a:ext cx="1358900" cy="274320"/>
+          </a:xfrm>
+          <a:prstGeom prst="rect">
+            <a:avLst/>
+          </a:prstGeom>
+          <a:noFill/>
+          <a:ln/>
+        </p:spPr>
+        <p:txBody>
+          <a:bodyPr wrap="square" lIns="0" tIns="0" rIns="0" bIns="0" rtlCol="0" anchor="ctr"/>
+          <a:lstStyle/>
+          <a:p>
+            <a:pPr indent="0" marL="0">
+              <a:buNone/>
+            </a:pPr>
+            <a:r>
+              <a:rPr lang="en-US" sz="1100" b="1" dirty="0">
+                <a:solidFill>
+                  <a:srgbClr val="075985"/>
+                </a:solidFill>
+                <a:latin typeface="Calibri" pitchFamily="34" charset="0"/>
+                <a:ea typeface="Calibri" pitchFamily="34" charset="-122"/>
+                <a:cs typeface="Calibri" pitchFamily="34" charset="-120"/>
+              </a:rPr>
+              <a:t>UNDERSTAND NOW</a:t>
+            </a:r>
+            <a:endParaRPr lang="en-US" sz="1100" dirty="0"/>
+          </a:p>
+        </p:txBody>
+      </p:sp>
+      <p:sp>
+        <p:nvSpPr>
           <p:cNvPr id="25" name="Slide Number Placeholder 0"/>
           <p:cNvSpPr>
             <a:spLocks noGrp="1"/>
@@ -3562,6 +3990,158 @@
       </p:sp>
       <p:sp>
         <p:nvSpPr>
+          <p:cNvPr id="5" name="Shape 3"/>
+          <p:cNvSpPr/>
+          <p:nvPr/>
+        </p:nvSpPr>
+        <p:spPr>
+          <a:xfrm>
+            <a:off x="8959672" y="91440"/>
+            <a:ext cx="2683383" cy="274320"/>
+          </a:xfrm>
+          <a:prstGeom prst="rect">
+            <a:avLst/>
+          </a:prstGeom>
+          <a:solidFill>
+            <a:srgbClr val="FEF3C7"/>
+          </a:solidFill>
+          <a:ln w="12700">
+            <a:solidFill>
+              <a:srgbClr val="B45309"/>
+            </a:solidFill>
+            <a:prstDash val="solid"/>
+          </a:ln>
+        </p:spPr>
+      </p:sp>
+      <p:sp>
+        <p:nvSpPr>
+          <p:cNvPr id="6" name="Shape 4"/>
+          <p:cNvSpPr/>
+          <p:nvPr/>
+        </p:nvSpPr>
+        <p:spPr>
+          <a:xfrm>
+            <a:off x="8959672" y="91440"/>
+            <a:ext cx="27432" cy="274320"/>
+          </a:xfrm>
+          <a:prstGeom prst="rect">
+            <a:avLst/>
+          </a:prstGeom>
+          <a:solidFill>
+            <a:srgbClr val="B45309"/>
+          </a:solidFill>
+          <a:ln w="12700">
+            <a:solidFill>
+              <a:srgbClr val="B45309"/>
+            </a:solidFill>
+            <a:prstDash val="solid"/>
+          </a:ln>
+        </p:spPr>
+      </p:sp>
+      <p:sp>
+        <p:nvSpPr>
+          <p:cNvPr id="7" name="Shape 5"/>
+          <p:cNvSpPr/>
+          <p:nvPr/>
+        </p:nvSpPr>
+        <p:spPr>
+          <a:xfrm>
+            <a:off x="9014536" y="91440"/>
+            <a:ext cx="27432" cy="274320"/>
+          </a:xfrm>
+          <a:prstGeom prst="rect">
+            <a:avLst/>
+          </a:prstGeom>
+          <a:solidFill>
+            <a:srgbClr val="B45309"/>
+          </a:solidFill>
+          <a:ln w="12700">
+            <a:solidFill>
+              <a:srgbClr val="B45309"/>
+            </a:solidFill>
+            <a:prstDash val="solid"/>
+          </a:ln>
+        </p:spPr>
+      </p:sp>
+      <p:pic>
+        <p:nvPicPr>
+          <p:cNvPr id="8" name="Image 0" descr="preencoded.png">    </p:cNvPr>
+          <p:cNvPicPr>
+            <a:picLocks noChangeAspect="1"/>
+          </p:cNvPicPr>
+          <p:nvPr/>
+        </p:nvPicPr>
+        <p:blipFill>
+          <a:blip r:embed="rId1"/>
+          <a:stretch>
+            <a:fillRect/>
+          </a:stretch>
+        </p:blipFill>
+        <p:spPr>
+          <a:xfrm>
+            <a:off x="9087688" y="128016"/>
+            <a:ext cx="201168" cy="201168"/>
+          </a:xfrm>
+          <a:prstGeom prst="rect">
+            <a:avLst/>
+          </a:prstGeom>
+        </p:spPr>
+      </p:pic>
+      <p:sp>
+        <p:nvSpPr>
+          <p:cNvPr id="9" name="Text 6"/>
+          <p:cNvSpPr txBox="1"/>
+          <p:nvPr/>
+        </p:nvSpPr>
+        <p:spPr>
+          <a:xfrm>
+            <a:off x="9343720" y="91440"/>
+            <a:ext cx="2262759" cy="274320"/>
+          </a:xfrm>
+          <a:prstGeom prst="rect">
+            <a:avLst/>
+          </a:prstGeom>
+          <a:noFill/>
+          <a:ln/>
+        </p:spPr>
+        <p:txBody>
+          <a:bodyPr wrap="square" lIns="0" tIns="0" rIns="0" bIns="0" rtlCol="0" anchor="ctr"/>
+          <a:lstStyle/>
+          <a:p>
+            <a:pPr indent="0" marL="0">
+              <a:buNone/>
+            </a:pPr>
+            <a:r>
+              <a:rPr lang="en-US" sz="1100" b="1" dirty="0">
+                <a:solidFill>
+                  <a:srgbClr val="92400E"/>
+                </a:solidFill>
+                <a:latin typeface="Calibri" pitchFamily="34" charset="0"/>
+                <a:ea typeface="Calibri" pitchFamily="34" charset="-122"/>
+                <a:cs typeface="Calibri" pitchFamily="34" charset="-120"/>
+              </a:rPr>
+              <a:t>USE NOW</a:t>
+            </a:r>
+            <a:pPr indent="0" marL="0">
+              <a:buNone/>
+            </a:pPr>
+            <a:r>
+              <a:rPr lang="en-US" sz="1100" dirty="0">
+                <a:solidFill>
+                  <a:srgbClr val="92400E"/>
+                </a:solidFill>
+                <a:latin typeface="Calibri" pitchFamily="34" charset="0"/>
+                <a:ea typeface="Calibri" pitchFamily="34" charset="-122"/>
+                <a:cs typeface="Calibri" pitchFamily="34" charset="-120"/>
+              </a:rPr>
+              <a:t> · the complete program</a:t>
+            </a:r>
+            <a:endParaRPr lang="en-US" sz="1100" dirty="0"/>
+          </a:p>
+        </p:txBody>
+      </p:sp>
+      <p:sp>
+        <p:nvSpPr>
           <p:cNvPr id="25" name="Slide Number Placeholder 0"/>
           <p:cNvSpPr>
             <a:spLocks noGrp="1"/>
@@ -4715,6 +5295,158 @@
       </p:sp>
       <p:sp>
         <p:nvSpPr>
+          <p:cNvPr id="17" name="Shape 15"/>
+          <p:cNvSpPr/>
+          <p:nvPr/>
+        </p:nvSpPr>
+        <p:spPr>
+          <a:xfrm>
+            <a:off x="9287967" y="91440"/>
+            <a:ext cx="2355088" cy="274320"/>
+          </a:xfrm>
+          <a:prstGeom prst="rect">
+            <a:avLst/>
+          </a:prstGeom>
+          <a:solidFill>
+            <a:srgbClr val="FEF3C7"/>
+          </a:solidFill>
+          <a:ln w="12700">
+            <a:solidFill>
+              <a:srgbClr val="B45309"/>
+            </a:solidFill>
+            <a:prstDash val="solid"/>
+          </a:ln>
+        </p:spPr>
+      </p:sp>
+      <p:sp>
+        <p:nvSpPr>
+          <p:cNvPr id="18" name="Shape 16"/>
+          <p:cNvSpPr/>
+          <p:nvPr/>
+        </p:nvSpPr>
+        <p:spPr>
+          <a:xfrm>
+            <a:off x="9287967" y="91440"/>
+            <a:ext cx="27432" cy="274320"/>
+          </a:xfrm>
+          <a:prstGeom prst="rect">
+            <a:avLst/>
+          </a:prstGeom>
+          <a:solidFill>
+            <a:srgbClr val="B45309"/>
+          </a:solidFill>
+          <a:ln w="12700">
+            <a:solidFill>
+              <a:srgbClr val="B45309"/>
+            </a:solidFill>
+            <a:prstDash val="solid"/>
+          </a:ln>
+        </p:spPr>
+      </p:sp>
+      <p:sp>
+        <p:nvSpPr>
+          <p:cNvPr id="19" name="Shape 17"/>
+          <p:cNvSpPr/>
+          <p:nvPr/>
+        </p:nvSpPr>
+        <p:spPr>
+          <a:xfrm>
+            <a:off x="9342831" y="91440"/>
+            <a:ext cx="27432" cy="274320"/>
+          </a:xfrm>
+          <a:prstGeom prst="rect">
+            <a:avLst/>
+          </a:prstGeom>
+          <a:solidFill>
+            <a:srgbClr val="B45309"/>
+          </a:solidFill>
+          <a:ln w="12700">
+            <a:solidFill>
+              <a:srgbClr val="B45309"/>
+            </a:solidFill>
+            <a:prstDash val="solid"/>
+          </a:ln>
+        </p:spPr>
+      </p:sp>
+      <p:pic>
+        <p:nvPicPr>
+          <p:cNvPr id="20" name="Image 0" descr="preencoded.png">    </p:cNvPr>
+          <p:cNvPicPr>
+            <a:picLocks noChangeAspect="1"/>
+          </p:cNvPicPr>
+          <p:nvPr/>
+        </p:nvPicPr>
+        <p:blipFill>
+          <a:blip r:embed="rId1"/>
+          <a:stretch>
+            <a:fillRect/>
+          </a:stretch>
+        </p:blipFill>
+        <p:spPr>
+          <a:xfrm>
+            <a:off x="9415983" y="128016"/>
+            <a:ext cx="201168" cy="201168"/>
+          </a:xfrm>
+          <a:prstGeom prst="rect">
+            <a:avLst/>
+          </a:prstGeom>
+        </p:spPr>
+      </p:pic>
+      <p:sp>
+        <p:nvSpPr>
+          <p:cNvPr id="21" name="Text 18"/>
+          <p:cNvSpPr txBox="1"/>
+          <p:nvPr/>
+        </p:nvSpPr>
+        <p:spPr>
+          <a:xfrm>
+            <a:off x="9672015" y="91440"/>
+            <a:ext cx="1934464" cy="274320"/>
+          </a:xfrm>
+          <a:prstGeom prst="rect">
+            <a:avLst/>
+          </a:prstGeom>
+          <a:noFill/>
+          <a:ln/>
+        </p:spPr>
+        <p:txBody>
+          <a:bodyPr wrap="square" lIns="0" tIns="0" rIns="0" bIns="0" rtlCol="0" anchor="ctr"/>
+          <a:lstStyle/>
+          <a:p>
+            <a:pPr indent="0" marL="0">
+              <a:buNone/>
+            </a:pPr>
+            <a:r>
+              <a:rPr lang="en-US" sz="1100" b="1" dirty="0">
+                <a:solidFill>
+                  <a:srgbClr val="92400E"/>
+                </a:solidFill>
+                <a:latin typeface="Calibri" pitchFamily="34" charset="0"/>
+                <a:ea typeface="Calibri" pitchFamily="34" charset="-122"/>
+                <a:cs typeface="Calibri" pitchFamily="34" charset="-120"/>
+              </a:rPr>
+              <a:t>USE NOW</a:t>
+            </a:r>
+            <a:pPr indent="0" marL="0">
+              <a:buNone/>
+            </a:pPr>
+            <a:r>
+              <a:rPr lang="en-US" sz="1100" dirty="0">
+                <a:solidFill>
+                  <a:srgbClr val="92400E"/>
+                </a:solidFill>
+                <a:latin typeface="Calibri" pitchFamily="34" charset="0"/>
+                <a:ea typeface="Calibri" pitchFamily="34" charset="-122"/>
+                <a:cs typeface="Calibri" pitchFamily="34" charset="-120"/>
+              </a:rPr>
+              <a:t> · the PRG32 tools</a:t>
+            </a:r>
+            <a:endParaRPr lang="en-US" sz="1100" dirty="0"/>
+          </a:p>
+        </p:txBody>
+      </p:sp>
+      <p:sp>
+        <p:nvSpPr>
           <p:cNvPr id="25" name="Slide Number Placeholder 0"/>
           <p:cNvSpPr>
             <a:spLocks noGrp="1"/>
@@ -5551,6 +6283,158 @@
       </p:sp>
       <p:sp>
         <p:nvSpPr>
+          <p:cNvPr id="17" name="Shape 15"/>
+          <p:cNvSpPr/>
+          <p:nvPr/>
+        </p:nvSpPr>
+        <p:spPr>
+          <a:xfrm>
+            <a:off x="9287967" y="91440"/>
+            <a:ext cx="2355088" cy="274320"/>
+          </a:xfrm>
+          <a:prstGeom prst="rect">
+            <a:avLst/>
+          </a:prstGeom>
+          <a:solidFill>
+            <a:srgbClr val="FEF3C7"/>
+          </a:solidFill>
+          <a:ln w="12700">
+            <a:solidFill>
+              <a:srgbClr val="B45309"/>
+            </a:solidFill>
+            <a:prstDash val="solid"/>
+          </a:ln>
+        </p:spPr>
+      </p:sp>
+      <p:sp>
+        <p:nvSpPr>
+          <p:cNvPr id="18" name="Shape 16"/>
+          <p:cNvSpPr/>
+          <p:nvPr/>
+        </p:nvSpPr>
+        <p:spPr>
+          <a:xfrm>
+            <a:off x="9287967" y="91440"/>
+            <a:ext cx="27432" cy="274320"/>
+          </a:xfrm>
+          <a:prstGeom prst="rect">
+            <a:avLst/>
+          </a:prstGeom>
+          <a:solidFill>
+            <a:srgbClr val="B45309"/>
+          </a:solidFill>
+          <a:ln w="12700">
+            <a:solidFill>
+              <a:srgbClr val="B45309"/>
+            </a:solidFill>
+            <a:prstDash val="solid"/>
+          </a:ln>
+        </p:spPr>
+      </p:sp>
+      <p:sp>
+        <p:nvSpPr>
+          <p:cNvPr id="19" name="Shape 17"/>
+          <p:cNvSpPr/>
+          <p:nvPr/>
+        </p:nvSpPr>
+        <p:spPr>
+          <a:xfrm>
+            <a:off x="9342831" y="91440"/>
+            <a:ext cx="27432" cy="274320"/>
+          </a:xfrm>
+          <a:prstGeom prst="rect">
+            <a:avLst/>
+          </a:prstGeom>
+          <a:solidFill>
+            <a:srgbClr val="B45309"/>
+          </a:solidFill>
+          <a:ln w="12700">
+            <a:solidFill>
+              <a:srgbClr val="B45309"/>
+            </a:solidFill>
+            <a:prstDash val="solid"/>
+          </a:ln>
+        </p:spPr>
+      </p:sp>
+      <p:pic>
+        <p:nvPicPr>
+          <p:cNvPr id="20" name="Image 0" descr="preencoded.png">    </p:cNvPr>
+          <p:cNvPicPr>
+            <a:picLocks noChangeAspect="1"/>
+          </p:cNvPicPr>
+          <p:nvPr/>
+        </p:nvPicPr>
+        <p:blipFill>
+          <a:blip r:embed="rId1"/>
+          <a:stretch>
+            <a:fillRect/>
+          </a:stretch>
+        </p:blipFill>
+        <p:spPr>
+          <a:xfrm>
+            <a:off x="9415983" y="128016"/>
+            <a:ext cx="201168" cy="201168"/>
+          </a:xfrm>
+          <a:prstGeom prst="rect">
+            <a:avLst/>
+          </a:prstGeom>
+        </p:spPr>
+      </p:pic>
+      <p:sp>
+        <p:nvSpPr>
+          <p:cNvPr id="21" name="Text 18"/>
+          <p:cNvSpPr txBox="1"/>
+          <p:nvPr/>
+        </p:nvSpPr>
+        <p:spPr>
+          <a:xfrm>
+            <a:off x="9672015" y="91440"/>
+            <a:ext cx="1934464" cy="274320"/>
+          </a:xfrm>
+          <a:prstGeom prst="rect">
+            <a:avLst/>
+          </a:prstGeom>
+          <a:noFill/>
+          <a:ln/>
+        </p:spPr>
+        <p:txBody>
+          <a:bodyPr wrap="square" lIns="0" tIns="0" rIns="0" bIns="0" rtlCol="0" anchor="ctr"/>
+          <a:lstStyle/>
+          <a:p>
+            <a:pPr indent="0" marL="0">
+              <a:buNone/>
+            </a:pPr>
+            <a:r>
+              <a:rPr lang="en-US" sz="1100" b="1" dirty="0">
+                <a:solidFill>
+                  <a:srgbClr val="92400E"/>
+                </a:solidFill>
+                <a:latin typeface="Calibri" pitchFamily="34" charset="0"/>
+                <a:ea typeface="Calibri" pitchFamily="34" charset="-122"/>
+                <a:cs typeface="Calibri" pitchFamily="34" charset="-120"/>
+              </a:rPr>
+              <a:t>USE NOW</a:t>
+            </a:r>
+            <a:pPr indent="0" marL="0">
+              <a:buNone/>
+            </a:pPr>
+            <a:r>
+              <a:rPr lang="en-US" sz="1100" dirty="0">
+                <a:solidFill>
+                  <a:srgbClr val="92400E"/>
+                </a:solidFill>
+                <a:latin typeface="Calibri" pitchFamily="34" charset="0"/>
+                <a:ea typeface="Calibri" pitchFamily="34" charset="-122"/>
+                <a:cs typeface="Calibri" pitchFamily="34" charset="-120"/>
+              </a:rPr>
+              <a:t> · the PRG32 tools</a:t>
+            </a:r>
+            <a:endParaRPr lang="en-US" sz="1100" dirty="0"/>
+          </a:p>
+        </p:txBody>
+      </p:sp>
+      <p:sp>
+        <p:nvSpPr>
           <p:cNvPr id="25" name="Slide Number Placeholder 0"/>
           <p:cNvSpPr>
             <a:spLocks noGrp="1"/>
@@ -6382,6 +7266,158 @@
               <a:t>A black screen: check the wiring of the display against the firmware</a:t>
             </a:r>
             <a:endParaRPr lang="en-US" sz="1200" dirty="0"/>
+          </a:p>
+        </p:txBody>
+      </p:sp>
+      <p:sp>
+        <p:nvSpPr>
+          <p:cNvPr id="17" name="Shape 15"/>
+          <p:cNvSpPr/>
+          <p:nvPr/>
+        </p:nvSpPr>
+        <p:spPr>
+          <a:xfrm>
+            <a:off x="9287967" y="91440"/>
+            <a:ext cx="2355088" cy="274320"/>
+          </a:xfrm>
+          <a:prstGeom prst="rect">
+            <a:avLst/>
+          </a:prstGeom>
+          <a:solidFill>
+            <a:srgbClr val="FEF3C7"/>
+          </a:solidFill>
+          <a:ln w="12700">
+            <a:solidFill>
+              <a:srgbClr val="B45309"/>
+            </a:solidFill>
+            <a:prstDash val="solid"/>
+          </a:ln>
+        </p:spPr>
+      </p:sp>
+      <p:sp>
+        <p:nvSpPr>
+          <p:cNvPr id="18" name="Shape 16"/>
+          <p:cNvSpPr/>
+          <p:nvPr/>
+        </p:nvSpPr>
+        <p:spPr>
+          <a:xfrm>
+            <a:off x="9287967" y="91440"/>
+            <a:ext cx="27432" cy="274320"/>
+          </a:xfrm>
+          <a:prstGeom prst="rect">
+            <a:avLst/>
+          </a:prstGeom>
+          <a:solidFill>
+            <a:srgbClr val="B45309"/>
+          </a:solidFill>
+          <a:ln w="12700">
+            <a:solidFill>
+              <a:srgbClr val="B45309"/>
+            </a:solidFill>
+            <a:prstDash val="solid"/>
+          </a:ln>
+        </p:spPr>
+      </p:sp>
+      <p:sp>
+        <p:nvSpPr>
+          <p:cNvPr id="19" name="Shape 17"/>
+          <p:cNvSpPr/>
+          <p:nvPr/>
+        </p:nvSpPr>
+        <p:spPr>
+          <a:xfrm>
+            <a:off x="9342831" y="91440"/>
+            <a:ext cx="27432" cy="274320"/>
+          </a:xfrm>
+          <a:prstGeom prst="rect">
+            <a:avLst/>
+          </a:prstGeom>
+          <a:solidFill>
+            <a:srgbClr val="B45309"/>
+          </a:solidFill>
+          <a:ln w="12700">
+            <a:solidFill>
+              <a:srgbClr val="B45309"/>
+            </a:solidFill>
+            <a:prstDash val="solid"/>
+          </a:ln>
+        </p:spPr>
+      </p:sp>
+      <p:pic>
+        <p:nvPicPr>
+          <p:cNvPr id="20" name="Image 0" descr="preencoded.png">    </p:cNvPr>
+          <p:cNvPicPr>
+            <a:picLocks noChangeAspect="1"/>
+          </p:cNvPicPr>
+          <p:nvPr/>
+        </p:nvPicPr>
+        <p:blipFill>
+          <a:blip r:embed="rId1"/>
+          <a:stretch>
+            <a:fillRect/>
+          </a:stretch>
+        </p:blipFill>
+        <p:spPr>
+          <a:xfrm>
+            <a:off x="9415983" y="128016"/>
+            <a:ext cx="201168" cy="201168"/>
+          </a:xfrm>
+          <a:prstGeom prst="rect">
+            <a:avLst/>
+          </a:prstGeom>
+        </p:spPr>
+      </p:pic>
+      <p:sp>
+        <p:nvSpPr>
+          <p:cNvPr id="21" name="Text 18"/>
+          <p:cNvSpPr txBox="1"/>
+          <p:nvPr/>
+        </p:nvSpPr>
+        <p:spPr>
+          <a:xfrm>
+            <a:off x="9672015" y="91440"/>
+            <a:ext cx="1934464" cy="274320"/>
+          </a:xfrm>
+          <a:prstGeom prst="rect">
+            <a:avLst/>
+          </a:prstGeom>
+          <a:noFill/>
+          <a:ln/>
+        </p:spPr>
+        <p:txBody>
+          <a:bodyPr wrap="square" lIns="0" tIns="0" rIns="0" bIns="0" rtlCol="0" anchor="ctr"/>
+          <a:lstStyle/>
+          <a:p>
+            <a:pPr indent="0" marL="0">
+              <a:buNone/>
+            </a:pPr>
+            <a:r>
+              <a:rPr lang="en-US" sz="1100" b="1" dirty="0">
+                <a:solidFill>
+                  <a:srgbClr val="92400E"/>
+                </a:solidFill>
+                <a:latin typeface="Calibri" pitchFamily="34" charset="0"/>
+                <a:ea typeface="Calibri" pitchFamily="34" charset="-122"/>
+                <a:cs typeface="Calibri" pitchFamily="34" charset="-120"/>
+              </a:rPr>
+              <a:t>USE NOW</a:t>
+            </a:r>
+            <a:pPr indent="0" marL="0">
+              <a:buNone/>
+            </a:pPr>
+            <a:r>
+              <a:rPr lang="en-US" sz="1100" dirty="0">
+                <a:solidFill>
+                  <a:srgbClr val="92400E"/>
+                </a:solidFill>
+                <a:latin typeface="Calibri" pitchFamily="34" charset="0"/>
+                <a:ea typeface="Calibri" pitchFamily="34" charset="-122"/>
+                <a:cs typeface="Calibri" pitchFamily="34" charset="-120"/>
+              </a:rPr>
+              <a:t> · the PRG32 tools</a:t>
+            </a:r>
+            <a:endParaRPr lang="en-US" sz="1100" dirty="0"/>
           </a:p>
         </p:txBody>
       </p:sp>
@@ -7768,6 +8804,158 @@
       </p:graphicFrame>
       <p:sp>
         <p:nvSpPr>
+          <p:cNvPr id="4" name="Shape 1"/>
+          <p:cNvSpPr/>
+          <p:nvPr/>
+        </p:nvSpPr>
+        <p:spPr>
+          <a:xfrm>
+            <a:off x="9287967" y="91440"/>
+            <a:ext cx="2355088" cy="274320"/>
+          </a:xfrm>
+          <a:prstGeom prst="rect">
+            <a:avLst/>
+          </a:prstGeom>
+          <a:solidFill>
+            <a:srgbClr val="FEF3C7"/>
+          </a:solidFill>
+          <a:ln w="12700">
+            <a:solidFill>
+              <a:srgbClr val="B45309"/>
+            </a:solidFill>
+            <a:prstDash val="solid"/>
+          </a:ln>
+        </p:spPr>
+      </p:sp>
+      <p:sp>
+        <p:nvSpPr>
+          <p:cNvPr id="5" name="Shape 2"/>
+          <p:cNvSpPr/>
+          <p:nvPr/>
+        </p:nvSpPr>
+        <p:spPr>
+          <a:xfrm>
+            <a:off x="9287967" y="91440"/>
+            <a:ext cx="27432" cy="274320"/>
+          </a:xfrm>
+          <a:prstGeom prst="rect">
+            <a:avLst/>
+          </a:prstGeom>
+          <a:solidFill>
+            <a:srgbClr val="B45309"/>
+          </a:solidFill>
+          <a:ln w="12700">
+            <a:solidFill>
+              <a:srgbClr val="B45309"/>
+            </a:solidFill>
+            <a:prstDash val="solid"/>
+          </a:ln>
+        </p:spPr>
+      </p:sp>
+      <p:sp>
+        <p:nvSpPr>
+          <p:cNvPr id="6" name="Shape 3"/>
+          <p:cNvSpPr/>
+          <p:nvPr/>
+        </p:nvSpPr>
+        <p:spPr>
+          <a:xfrm>
+            <a:off x="9342831" y="91440"/>
+            <a:ext cx="27432" cy="274320"/>
+          </a:xfrm>
+          <a:prstGeom prst="rect">
+            <a:avLst/>
+          </a:prstGeom>
+          <a:solidFill>
+            <a:srgbClr val="B45309"/>
+          </a:solidFill>
+          <a:ln w="12700">
+            <a:solidFill>
+              <a:srgbClr val="B45309"/>
+            </a:solidFill>
+            <a:prstDash val="solid"/>
+          </a:ln>
+        </p:spPr>
+      </p:sp>
+      <p:pic>
+        <p:nvPicPr>
+          <p:cNvPr id="7" name="Image 0" descr="preencoded.png">    </p:cNvPr>
+          <p:cNvPicPr>
+            <a:picLocks noChangeAspect="1"/>
+          </p:cNvPicPr>
+          <p:nvPr/>
+        </p:nvPicPr>
+        <p:blipFill>
+          <a:blip r:embed="rId1"/>
+          <a:stretch>
+            <a:fillRect/>
+          </a:stretch>
+        </p:blipFill>
+        <p:spPr>
+          <a:xfrm>
+            <a:off x="9415983" y="128016"/>
+            <a:ext cx="201168" cy="201168"/>
+          </a:xfrm>
+          <a:prstGeom prst="rect">
+            <a:avLst/>
+          </a:prstGeom>
+        </p:spPr>
+      </p:pic>
+      <p:sp>
+        <p:nvSpPr>
+          <p:cNvPr id="8" name="Text 4"/>
+          <p:cNvSpPr txBox="1"/>
+          <p:nvPr/>
+        </p:nvSpPr>
+        <p:spPr>
+          <a:xfrm>
+            <a:off x="9672015" y="91440"/>
+            <a:ext cx="1934464" cy="274320"/>
+          </a:xfrm>
+          <a:prstGeom prst="rect">
+            <a:avLst/>
+          </a:prstGeom>
+          <a:noFill/>
+          <a:ln/>
+        </p:spPr>
+        <p:txBody>
+          <a:bodyPr wrap="square" lIns="0" tIns="0" rIns="0" bIns="0" rtlCol="0" anchor="ctr"/>
+          <a:lstStyle/>
+          <a:p>
+            <a:pPr indent="0" marL="0">
+              <a:buNone/>
+            </a:pPr>
+            <a:r>
+              <a:rPr lang="en-US" sz="1100" b="1" dirty="0">
+                <a:solidFill>
+                  <a:srgbClr val="92400E"/>
+                </a:solidFill>
+                <a:latin typeface="Calibri" pitchFamily="34" charset="0"/>
+                <a:ea typeface="Calibri" pitchFamily="34" charset="-122"/>
+                <a:cs typeface="Calibri" pitchFamily="34" charset="-120"/>
+              </a:rPr>
+              <a:t>USE NOW</a:t>
+            </a:r>
+            <a:pPr indent="0" marL="0">
+              <a:buNone/>
+            </a:pPr>
+            <a:r>
+              <a:rPr lang="en-US" sz="1100" dirty="0">
+                <a:solidFill>
+                  <a:srgbClr val="92400E"/>
+                </a:solidFill>
+                <a:latin typeface="Calibri" pitchFamily="34" charset="0"/>
+                <a:ea typeface="Calibri" pitchFamily="34" charset="-122"/>
+                <a:cs typeface="Calibri" pitchFamily="34" charset="-120"/>
+              </a:rPr>
+              <a:t> · the PRG32 tools</a:t>
+            </a:r>
+            <a:endParaRPr lang="en-US" sz="1100" dirty="0"/>
+          </a:p>
+        </p:txBody>
+      </p:sp>
+      <p:sp>
+        <p:nvSpPr>
           <p:cNvPr id="25" name="Slide Number Placeholder 0"/>
           <p:cNvSpPr>
             <a:spLocks noGrp="1"/>
@@ -9925,6 +11113,158 @@
       </p:sp>
       <p:sp>
         <p:nvSpPr>
+          <p:cNvPr id="17" name="Shape 15"/>
+          <p:cNvSpPr/>
+          <p:nvPr/>
+        </p:nvSpPr>
+        <p:spPr>
+          <a:xfrm>
+            <a:off x="8697036" y="91440"/>
+            <a:ext cx="2946019" cy="274320"/>
+          </a:xfrm>
+          <a:prstGeom prst="rect">
+            <a:avLst/>
+          </a:prstGeom>
+          <a:solidFill>
+            <a:srgbClr val="FEF3C7"/>
+          </a:solidFill>
+          <a:ln w="12700">
+            <a:solidFill>
+              <a:srgbClr val="B45309"/>
+            </a:solidFill>
+            <a:prstDash val="solid"/>
+          </a:ln>
+        </p:spPr>
+      </p:sp>
+      <p:sp>
+        <p:nvSpPr>
+          <p:cNvPr id="18" name="Shape 16"/>
+          <p:cNvSpPr/>
+          <p:nvPr/>
+        </p:nvSpPr>
+        <p:spPr>
+          <a:xfrm>
+            <a:off x="8697036" y="91440"/>
+            <a:ext cx="27432" cy="274320"/>
+          </a:xfrm>
+          <a:prstGeom prst="rect">
+            <a:avLst/>
+          </a:prstGeom>
+          <a:solidFill>
+            <a:srgbClr val="B45309"/>
+          </a:solidFill>
+          <a:ln w="12700">
+            <a:solidFill>
+              <a:srgbClr val="B45309"/>
+            </a:solidFill>
+            <a:prstDash val="solid"/>
+          </a:ln>
+        </p:spPr>
+      </p:sp>
+      <p:sp>
+        <p:nvSpPr>
+          <p:cNvPr id="19" name="Shape 17"/>
+          <p:cNvSpPr/>
+          <p:nvPr/>
+        </p:nvSpPr>
+        <p:spPr>
+          <a:xfrm>
+            <a:off x="8751900" y="91440"/>
+            <a:ext cx="27432" cy="274320"/>
+          </a:xfrm>
+          <a:prstGeom prst="rect">
+            <a:avLst/>
+          </a:prstGeom>
+          <a:solidFill>
+            <a:srgbClr val="B45309"/>
+          </a:solidFill>
+          <a:ln w="12700">
+            <a:solidFill>
+              <a:srgbClr val="B45309"/>
+            </a:solidFill>
+            <a:prstDash val="solid"/>
+          </a:ln>
+        </p:spPr>
+      </p:sp>
+      <p:pic>
+        <p:nvPicPr>
+          <p:cNvPr id="20" name="Image 0" descr="preencoded.png">    </p:cNvPr>
+          <p:cNvPicPr>
+            <a:picLocks noChangeAspect="1"/>
+          </p:cNvPicPr>
+          <p:nvPr/>
+        </p:nvPicPr>
+        <p:blipFill>
+          <a:blip r:embed="rId1"/>
+          <a:stretch>
+            <a:fillRect/>
+          </a:stretch>
+        </p:blipFill>
+        <p:spPr>
+          <a:xfrm>
+            <a:off x="8825052" y="128016"/>
+            <a:ext cx="201168" cy="201168"/>
+          </a:xfrm>
+          <a:prstGeom prst="rect">
+            <a:avLst/>
+          </a:prstGeom>
+        </p:spPr>
+      </p:pic>
+      <p:sp>
+        <p:nvSpPr>
+          <p:cNvPr id="21" name="Text 18"/>
+          <p:cNvSpPr txBox="1"/>
+          <p:nvPr/>
+        </p:nvSpPr>
+        <p:spPr>
+          <a:xfrm>
+            <a:off x="9081084" y="91440"/>
+            <a:ext cx="2525395" cy="274320"/>
+          </a:xfrm>
+          <a:prstGeom prst="rect">
+            <a:avLst/>
+          </a:prstGeom>
+          <a:noFill/>
+          <a:ln/>
+        </p:spPr>
+        <p:txBody>
+          <a:bodyPr wrap="square" lIns="0" tIns="0" rIns="0" bIns="0" rtlCol="0" anchor="ctr"/>
+          <a:lstStyle/>
+          <a:p>
+            <a:pPr indent="0" marL="0">
+              <a:buNone/>
+            </a:pPr>
+            <a:r>
+              <a:rPr lang="en-US" sz="1100" b="1" dirty="0">
+                <a:solidFill>
+                  <a:srgbClr val="92400E"/>
+                </a:solidFill>
+                <a:latin typeface="Calibri" pitchFamily="34" charset="0"/>
+                <a:ea typeface="Calibri" pitchFamily="34" charset="-122"/>
+                <a:cs typeface="Calibri" pitchFamily="34" charset="-120"/>
+              </a:rPr>
+              <a:t>USE NOW</a:t>
+            </a:r>
+            <a:pPr indent="0" marL="0">
+              <a:buNone/>
+            </a:pPr>
+            <a:r>
+              <a:rPr lang="en-US" sz="1100" dirty="0">
+                <a:solidFill>
+                  <a:srgbClr val="92400E"/>
+                </a:solidFill>
+                <a:latin typeface="Calibri" pitchFamily="34" charset="0"/>
+                <a:ea typeface="Calibri" pitchFamily="34" charset="-122"/>
+                <a:cs typeface="Calibri" pitchFamily="34" charset="-120"/>
+              </a:rPr>
+              <a:t> · the assembler directives</a:t>
+            </a:r>
+            <a:endParaRPr lang="en-US" sz="1100" dirty="0"/>
+          </a:p>
+        </p:txBody>
+      </p:sp>
+      <p:sp>
+        <p:nvSpPr>
           <p:cNvPr id="25" name="Slide Number Placeholder 0"/>
           <p:cNvSpPr>
             <a:spLocks noGrp="1"/>
@@ -10275,6 +11615,158 @@
       </p:sp>
       <p:sp>
         <p:nvSpPr>
+          <p:cNvPr id="5" name="Shape 3"/>
+          <p:cNvSpPr/>
+          <p:nvPr/>
+        </p:nvSpPr>
+        <p:spPr>
+          <a:xfrm>
+            <a:off x="9287967" y="91440"/>
+            <a:ext cx="2355088" cy="274320"/>
+          </a:xfrm>
+          <a:prstGeom prst="rect">
+            <a:avLst/>
+          </a:prstGeom>
+          <a:solidFill>
+            <a:srgbClr val="FEF3C7"/>
+          </a:solidFill>
+          <a:ln w="12700">
+            <a:solidFill>
+              <a:srgbClr val="B45309"/>
+            </a:solidFill>
+            <a:prstDash val="solid"/>
+          </a:ln>
+        </p:spPr>
+      </p:sp>
+      <p:sp>
+        <p:nvSpPr>
+          <p:cNvPr id="6" name="Shape 4"/>
+          <p:cNvSpPr/>
+          <p:nvPr/>
+        </p:nvSpPr>
+        <p:spPr>
+          <a:xfrm>
+            <a:off x="9287967" y="91440"/>
+            <a:ext cx="27432" cy="274320"/>
+          </a:xfrm>
+          <a:prstGeom prst="rect">
+            <a:avLst/>
+          </a:prstGeom>
+          <a:solidFill>
+            <a:srgbClr val="B45309"/>
+          </a:solidFill>
+          <a:ln w="12700">
+            <a:solidFill>
+              <a:srgbClr val="B45309"/>
+            </a:solidFill>
+            <a:prstDash val="solid"/>
+          </a:ln>
+        </p:spPr>
+      </p:sp>
+      <p:sp>
+        <p:nvSpPr>
+          <p:cNvPr id="7" name="Shape 5"/>
+          <p:cNvSpPr/>
+          <p:nvPr/>
+        </p:nvSpPr>
+        <p:spPr>
+          <a:xfrm>
+            <a:off x="9342831" y="91440"/>
+            <a:ext cx="27432" cy="274320"/>
+          </a:xfrm>
+          <a:prstGeom prst="rect">
+            <a:avLst/>
+          </a:prstGeom>
+          <a:solidFill>
+            <a:srgbClr val="B45309"/>
+          </a:solidFill>
+          <a:ln w="12700">
+            <a:solidFill>
+              <a:srgbClr val="B45309"/>
+            </a:solidFill>
+            <a:prstDash val="solid"/>
+          </a:ln>
+        </p:spPr>
+      </p:sp>
+      <p:pic>
+        <p:nvPicPr>
+          <p:cNvPr id="8" name="Image 0" descr="preencoded.png">    </p:cNvPr>
+          <p:cNvPicPr>
+            <a:picLocks noChangeAspect="1"/>
+          </p:cNvPicPr>
+          <p:nvPr/>
+        </p:nvPicPr>
+        <p:blipFill>
+          <a:blip r:embed="rId1"/>
+          <a:stretch>
+            <a:fillRect/>
+          </a:stretch>
+        </p:blipFill>
+        <p:spPr>
+          <a:xfrm>
+            <a:off x="9415983" y="128016"/>
+            <a:ext cx="201168" cy="201168"/>
+          </a:xfrm>
+          <a:prstGeom prst="rect">
+            <a:avLst/>
+          </a:prstGeom>
+        </p:spPr>
+      </p:pic>
+      <p:sp>
+        <p:nvSpPr>
+          <p:cNvPr id="9" name="Text 6"/>
+          <p:cNvSpPr txBox="1"/>
+          <p:nvPr/>
+        </p:nvSpPr>
+        <p:spPr>
+          <a:xfrm>
+            <a:off x="9672015" y="91440"/>
+            <a:ext cx="1934464" cy="274320"/>
+          </a:xfrm>
+          <a:prstGeom prst="rect">
+            <a:avLst/>
+          </a:prstGeom>
+          <a:noFill/>
+          <a:ln/>
+        </p:spPr>
+        <p:txBody>
+          <a:bodyPr wrap="square" lIns="0" tIns="0" rIns="0" bIns="0" rtlCol="0" anchor="ctr"/>
+          <a:lstStyle/>
+          <a:p>
+            <a:pPr indent="0" marL="0">
+              <a:buNone/>
+            </a:pPr>
+            <a:r>
+              <a:rPr lang="en-US" sz="1100" b="1" dirty="0">
+                <a:solidFill>
+                  <a:srgbClr val="92400E"/>
+                </a:solidFill>
+                <a:latin typeface="Calibri" pitchFamily="34" charset="0"/>
+                <a:ea typeface="Calibri" pitchFamily="34" charset="-122"/>
+                <a:cs typeface="Calibri" pitchFamily="34" charset="-120"/>
+              </a:rPr>
+              <a:t>USE NOW</a:t>
+            </a:r>
+            <a:pPr indent="0" marL="0">
+              <a:buNone/>
+            </a:pPr>
+            <a:r>
+              <a:rPr lang="en-US" sz="1100" dirty="0">
+                <a:solidFill>
+                  <a:srgbClr val="92400E"/>
+                </a:solidFill>
+                <a:latin typeface="Calibri" pitchFamily="34" charset="0"/>
+                <a:ea typeface="Calibri" pitchFamily="34" charset="-122"/>
+                <a:cs typeface="Calibri" pitchFamily="34" charset="-120"/>
+              </a:rPr>
+              <a:t> · the PRG32 tools</a:t>
+            </a:r>
+            <a:endParaRPr lang="en-US" sz="1100" dirty="0"/>
+          </a:p>
+        </p:txBody>
+      </p:sp>
+      <p:sp>
+        <p:nvSpPr>
           <p:cNvPr id="25" name="Slide Number Placeholder 0"/>
           <p:cNvSpPr>
             <a:spLocks noGrp="1"/>
@@ -11077,6 +12569,285 @@
       </p:sp>
       <p:sp>
         <p:nvSpPr>
+          <p:cNvPr id="10" name="Shape 7"/>
+          <p:cNvSpPr/>
+          <p:nvPr/>
+        </p:nvSpPr>
+        <p:spPr>
+          <a:xfrm>
+            <a:off x="8762695" y="91440"/>
+            <a:ext cx="2880360" cy="274320"/>
+          </a:xfrm>
+          <a:prstGeom prst="rect">
+            <a:avLst/>
+          </a:prstGeom>
+          <a:solidFill>
+            <a:srgbClr val="FEF3C7"/>
+          </a:solidFill>
+          <a:ln w="12700">
+            <a:solidFill>
+              <a:srgbClr val="B45309"/>
+            </a:solidFill>
+            <a:prstDash val="solid"/>
+          </a:ln>
+        </p:spPr>
+      </p:sp>
+      <p:sp>
+        <p:nvSpPr>
+          <p:cNvPr id="11" name="Shape 8"/>
+          <p:cNvSpPr/>
+          <p:nvPr/>
+        </p:nvSpPr>
+        <p:spPr>
+          <a:xfrm>
+            <a:off x="8762695" y="91440"/>
+            <a:ext cx="27432" cy="274320"/>
+          </a:xfrm>
+          <a:prstGeom prst="rect">
+            <a:avLst/>
+          </a:prstGeom>
+          <a:solidFill>
+            <a:srgbClr val="B45309"/>
+          </a:solidFill>
+          <a:ln w="12700">
+            <a:solidFill>
+              <a:srgbClr val="B45309"/>
+            </a:solidFill>
+            <a:prstDash val="solid"/>
+          </a:ln>
+        </p:spPr>
+      </p:sp>
+      <p:sp>
+        <p:nvSpPr>
+          <p:cNvPr id="12" name="Shape 9"/>
+          <p:cNvSpPr/>
+          <p:nvPr/>
+        </p:nvSpPr>
+        <p:spPr>
+          <a:xfrm>
+            <a:off x="8817559" y="91440"/>
+            <a:ext cx="27432" cy="274320"/>
+          </a:xfrm>
+          <a:prstGeom prst="rect">
+            <a:avLst/>
+          </a:prstGeom>
+          <a:solidFill>
+            <a:srgbClr val="B45309"/>
+          </a:solidFill>
+          <a:ln w="12700">
+            <a:solidFill>
+              <a:srgbClr val="B45309"/>
+            </a:solidFill>
+            <a:prstDash val="solid"/>
+          </a:ln>
+        </p:spPr>
+      </p:sp>
+      <p:pic>
+        <p:nvPicPr>
+          <p:cNvPr id="13" name="Image 1" descr="preencoded.png">    </p:cNvPr>
+          <p:cNvPicPr>
+            <a:picLocks noChangeAspect="1"/>
+          </p:cNvPicPr>
+          <p:nvPr/>
+        </p:nvPicPr>
+        <p:blipFill>
+          <a:blip r:embed="rId2"/>
+          <a:stretch>
+            <a:fillRect/>
+          </a:stretch>
+        </p:blipFill>
+        <p:spPr>
+          <a:xfrm>
+            <a:off x="8890711" y="128016"/>
+            <a:ext cx="201168" cy="201168"/>
+          </a:xfrm>
+          <a:prstGeom prst="rect">
+            <a:avLst/>
+          </a:prstGeom>
+        </p:spPr>
+      </p:pic>
+      <p:sp>
+        <p:nvSpPr>
+          <p:cNvPr id="14" name="Text 10"/>
+          <p:cNvSpPr txBox="1"/>
+          <p:nvPr/>
+        </p:nvSpPr>
+        <p:spPr>
+          <a:xfrm>
+            <a:off x="9146743" y="91440"/>
+            <a:ext cx="2459736" cy="274320"/>
+          </a:xfrm>
+          <a:prstGeom prst="rect">
+            <a:avLst/>
+          </a:prstGeom>
+          <a:noFill/>
+          <a:ln/>
+        </p:spPr>
+        <p:txBody>
+          <a:bodyPr wrap="square" lIns="0" tIns="0" rIns="0" bIns="0" rtlCol="0" anchor="ctr"/>
+          <a:lstStyle/>
+          <a:p>
+            <a:pPr indent="0" marL="0">
+              <a:buNone/>
+            </a:pPr>
+            <a:r>
+              <a:rPr lang="en-US" sz="1100" b="1" dirty="0">
+                <a:solidFill>
+                  <a:srgbClr val="92400E"/>
+                </a:solidFill>
+                <a:latin typeface="Calibri" pitchFamily="34" charset="0"/>
+                <a:ea typeface="Calibri" pitchFamily="34" charset="-122"/>
+                <a:cs typeface="Calibri" pitchFamily="34" charset="-120"/>
+              </a:rPr>
+              <a:t>USE NOW</a:t>
+            </a:r>
+            <a:pPr indent="0" marL="0">
+              <a:buNone/>
+            </a:pPr>
+            <a:r>
+              <a:rPr lang="en-US" sz="1100" dirty="0">
+                <a:solidFill>
+                  <a:srgbClr val="92400E"/>
+                </a:solidFill>
+                <a:latin typeface="Calibri" pitchFamily="34" charset="0"/>
+                <a:ea typeface="Calibri" pitchFamily="34" charset="-122"/>
+                <a:cs typeface="Calibri" pitchFamily="34" charset="-120"/>
+              </a:rPr>
+              <a:t> · the PRG32 runtime calls</a:t>
+            </a:r>
+            <a:endParaRPr lang="en-US" sz="1100" dirty="0"/>
+          </a:p>
+        </p:txBody>
+      </p:sp>
+      <p:sp>
+        <p:nvSpPr>
+          <p:cNvPr id="15" name="Shape 11"/>
+          <p:cNvSpPr/>
+          <p:nvPr/>
+        </p:nvSpPr>
+        <p:spPr>
+          <a:xfrm>
+            <a:off x="5297627" y="91440"/>
+            <a:ext cx="3355340" cy="274320"/>
+          </a:xfrm>
+          <a:prstGeom prst="rect">
+            <a:avLst/>
+          </a:prstGeom>
+          <a:solidFill>
+            <a:srgbClr val="E0F2FE"/>
+          </a:solidFill>
+          <a:ln w="12700">
+            <a:solidFill>
+              <a:srgbClr val="0369A1"/>
+            </a:solidFill>
+            <a:prstDash val="solid"/>
+          </a:ln>
+        </p:spPr>
+      </p:sp>
+      <p:sp>
+        <p:nvSpPr>
+          <p:cNvPr id="16" name="Shape 12"/>
+          <p:cNvSpPr/>
+          <p:nvPr/>
+        </p:nvSpPr>
+        <p:spPr>
+          <a:xfrm>
+            <a:off x="5297627" y="91440"/>
+            <a:ext cx="73152" cy="274320"/>
+          </a:xfrm>
+          <a:prstGeom prst="rect">
+            <a:avLst/>
+          </a:prstGeom>
+          <a:solidFill>
+            <a:srgbClr val="0369A1"/>
+          </a:solidFill>
+          <a:ln w="12700">
+            <a:solidFill>
+              <a:srgbClr val="0369A1"/>
+            </a:solidFill>
+            <a:prstDash val="solid"/>
+          </a:ln>
+        </p:spPr>
+      </p:sp>
+      <p:pic>
+        <p:nvPicPr>
+          <p:cNvPr id="17" name="Image 2" descr="preencoded.png">    </p:cNvPr>
+          <p:cNvPicPr>
+            <a:picLocks noChangeAspect="1"/>
+          </p:cNvPicPr>
+          <p:nvPr/>
+        </p:nvPicPr>
+        <p:blipFill>
+          <a:blip r:embed="rId3"/>
+          <a:stretch>
+            <a:fillRect/>
+          </a:stretch>
+        </p:blipFill>
+        <p:spPr>
+          <a:xfrm>
+            <a:off x="5425643" y="128016"/>
+            <a:ext cx="201168" cy="201168"/>
+          </a:xfrm>
+          <a:prstGeom prst="rect">
+            <a:avLst/>
+          </a:prstGeom>
+        </p:spPr>
+      </p:pic>
+      <p:sp>
+        <p:nvSpPr>
+          <p:cNvPr id="18" name="Text 13"/>
+          <p:cNvSpPr txBox="1"/>
+          <p:nvPr/>
+        </p:nvSpPr>
+        <p:spPr>
+          <a:xfrm>
+            <a:off x="5681675" y="91440"/>
+            <a:ext cx="2934716" cy="274320"/>
+          </a:xfrm>
+          <a:prstGeom prst="rect">
+            <a:avLst/>
+          </a:prstGeom>
+          <a:noFill/>
+          <a:ln/>
+        </p:spPr>
+        <p:txBody>
+          <a:bodyPr wrap="square" lIns="0" tIns="0" rIns="0" bIns="0" rtlCol="0" anchor="ctr"/>
+          <a:lstStyle/>
+          <a:p>
+            <a:pPr indent="0" marL="0">
+              <a:buNone/>
+            </a:pPr>
+            <a:r>
+              <a:rPr lang="en-US" sz="1100" b="1" dirty="0">
+                <a:solidFill>
+                  <a:srgbClr val="075985"/>
+                </a:solidFill>
+                <a:latin typeface="Calibri" pitchFamily="34" charset="0"/>
+                <a:ea typeface="Calibri" pitchFamily="34" charset="-122"/>
+                <a:cs typeface="Calibri" pitchFamily="34" charset="-120"/>
+              </a:rPr>
+              <a:t>UNDERSTAND NOW</a:t>
+            </a:r>
+            <a:pPr indent="0" marL="0">
+              <a:buNone/>
+            </a:pPr>
+            <a:r>
+              <a:rPr lang="en-US" sz="1100" dirty="0">
+                <a:solidFill>
+                  <a:srgbClr val="075985"/>
+                </a:solidFill>
+                <a:latin typeface="Calibri" pitchFamily="34" charset="0"/>
+                <a:ea typeface="Calibri" pitchFamily="34" charset="-122"/>
+                <a:cs typeface="Calibri" pitchFamily="34" charset="-120"/>
+              </a:rPr>
+              <a:t> · arguments in a0 to a7</a:t>
+            </a:r>
+            <a:endParaRPr lang="en-US" sz="1100" dirty="0"/>
+          </a:p>
+        </p:txBody>
+      </p:sp>
+      <p:sp>
+        <p:nvSpPr>
           <p:cNvPr id="25" name="Slide Number Placeholder 0"/>
           <p:cNvSpPr>
             <a:spLocks noGrp="1"/>
@@ -11963,6 +13734,133 @@
       </p:sp>
       <p:sp>
         <p:nvSpPr>
+          <p:cNvPr id="17" name="Shape 15"/>
+          <p:cNvSpPr/>
+          <p:nvPr/>
+        </p:nvSpPr>
+        <p:spPr>
+          <a:xfrm>
+            <a:off x="7893761" y="91440"/>
+            <a:ext cx="3749294" cy="274320"/>
+          </a:xfrm>
+          <a:prstGeom prst="rect">
+            <a:avLst/>
+          </a:prstGeom>
+          <a:solidFill>
+            <a:srgbClr val="E0F2FE"/>
+          </a:solidFill>
+          <a:ln w="12700">
+            <a:solidFill>
+              <a:srgbClr val="0369A1"/>
+            </a:solidFill>
+            <a:prstDash val="solid"/>
+          </a:ln>
+        </p:spPr>
+      </p:sp>
+      <p:sp>
+        <p:nvSpPr>
+          <p:cNvPr id="18" name="Shape 16"/>
+          <p:cNvSpPr/>
+          <p:nvPr/>
+        </p:nvSpPr>
+        <p:spPr>
+          <a:xfrm>
+            <a:off x="7893761" y="91440"/>
+            <a:ext cx="73152" cy="274320"/>
+          </a:xfrm>
+          <a:prstGeom prst="rect">
+            <a:avLst/>
+          </a:prstGeom>
+          <a:solidFill>
+            <a:srgbClr val="0369A1"/>
+          </a:solidFill>
+          <a:ln w="12700">
+            <a:solidFill>
+              <a:srgbClr val="0369A1"/>
+            </a:solidFill>
+            <a:prstDash val="solid"/>
+          </a:ln>
+        </p:spPr>
+      </p:sp>
+      <p:pic>
+        <p:nvPicPr>
+          <p:cNvPr id="19" name="Image 0" descr="preencoded.png">    </p:cNvPr>
+          <p:cNvPicPr>
+            <a:picLocks noChangeAspect="1"/>
+          </p:cNvPicPr>
+          <p:nvPr/>
+        </p:nvPicPr>
+        <p:blipFill>
+          <a:blip r:embed="rId1"/>
+          <a:stretch>
+            <a:fillRect/>
+          </a:stretch>
+        </p:blipFill>
+        <p:spPr>
+          <a:xfrm>
+            <a:off x="8021777" y="128016"/>
+            <a:ext cx="201168" cy="201168"/>
+          </a:xfrm>
+          <a:prstGeom prst="rect">
+            <a:avLst/>
+          </a:prstGeom>
+        </p:spPr>
+      </p:pic>
+      <p:sp>
+        <p:nvSpPr>
+          <p:cNvPr id="20" name="Text 17"/>
+          <p:cNvSpPr txBox="1"/>
+          <p:nvPr/>
+        </p:nvSpPr>
+        <p:spPr>
+          <a:xfrm>
+            <a:off x="8277809" y="91440"/>
+            <a:ext cx="3328670" cy="274320"/>
+          </a:xfrm>
+          <a:prstGeom prst="rect">
+            <a:avLst/>
+          </a:prstGeom>
+          <a:noFill/>
+          <a:ln/>
+        </p:spPr>
+        <p:txBody>
+          <a:bodyPr wrap="square" lIns="0" tIns="0" rIns="0" bIns="0" rtlCol="0" anchor="ctr"/>
+          <a:lstStyle/>
+          <a:p>
+            <a:pPr indent="0" marL="0">
+              <a:buNone/>
+            </a:pPr>
+            <a:r>
+              <a:rPr lang="en-US" sz="1100" b="1" dirty="0">
+                <a:solidFill>
+                  <a:srgbClr val="075985"/>
+                </a:solidFill>
+                <a:latin typeface="Calibri" pitchFamily="34" charset="0"/>
+                <a:ea typeface="Calibri" pitchFamily="34" charset="-122"/>
+                <a:cs typeface="Calibri" pitchFamily="34" charset="-120"/>
+              </a:rPr>
+              <a:t>UNDERSTAND NOW</a:t>
+            </a:r>
+            <a:pPr indent="0" marL="0">
+              <a:buNone/>
+            </a:pPr>
+            <a:r>
+              <a:rPr lang="en-US" sz="1100" dirty="0">
+                <a:solidFill>
+                  <a:srgbClr val="075985"/>
+                </a:solidFill>
+                <a:latin typeface="Calibri" pitchFamily="34" charset="0"/>
+                <a:ea typeface="Calibri" pitchFamily="34" charset="-122"/>
+                <a:cs typeface="Calibri" pitchFamily="34" charset="-120"/>
+              </a:rPr>
+              <a:t> · address, value, load, store</a:t>
+            </a:r>
+            <a:endParaRPr lang="en-US" sz="1100" dirty="0"/>
+          </a:p>
+        </p:txBody>
+      </p:sp>
+      <p:sp>
+        <p:nvSpPr>
           <p:cNvPr id="25" name="Slide Number Placeholder 0"/>
           <p:cNvSpPr>
             <a:spLocks noGrp="1"/>
@@ -12488,6 +14386,172 @@
       </p:sp>
       <p:sp>
         <p:nvSpPr>
+          <p:cNvPr id="10" name="Shape 7"/>
+          <p:cNvSpPr/>
+          <p:nvPr/>
+        </p:nvSpPr>
+        <p:spPr>
+          <a:xfrm>
+            <a:off x="8719388" y="91440"/>
+            <a:ext cx="2923667" cy="274320"/>
+          </a:xfrm>
+          <a:prstGeom prst="rect">
+            <a:avLst/>
+          </a:prstGeom>
+          <a:solidFill>
+            <a:srgbClr val="FEF3C7"/>
+          </a:solidFill>
+          <a:ln w="12700">
+            <a:solidFill>
+              <a:srgbClr val="B45309"/>
+            </a:solidFill>
+            <a:prstDash val="solid"/>
+          </a:ln>
+        </p:spPr>
+      </p:sp>
+      <p:sp>
+        <p:nvSpPr>
+          <p:cNvPr id="11" name="Shape 8"/>
+          <p:cNvSpPr/>
+          <p:nvPr/>
+        </p:nvSpPr>
+        <p:spPr>
+          <a:xfrm>
+            <a:off x="8719388" y="91440"/>
+            <a:ext cx="27432" cy="274320"/>
+          </a:xfrm>
+          <a:prstGeom prst="rect">
+            <a:avLst/>
+          </a:prstGeom>
+          <a:solidFill>
+            <a:srgbClr val="B45309"/>
+          </a:solidFill>
+          <a:ln w="12700">
+            <a:solidFill>
+              <a:srgbClr val="B45309"/>
+            </a:solidFill>
+            <a:prstDash val="solid"/>
+          </a:ln>
+        </p:spPr>
+      </p:sp>
+      <p:sp>
+        <p:nvSpPr>
+          <p:cNvPr id="12" name="Shape 9"/>
+          <p:cNvSpPr/>
+          <p:nvPr/>
+        </p:nvSpPr>
+        <p:spPr>
+          <a:xfrm>
+            <a:off x="8774252" y="91440"/>
+            <a:ext cx="27432" cy="274320"/>
+          </a:xfrm>
+          <a:prstGeom prst="rect">
+            <a:avLst/>
+          </a:prstGeom>
+          <a:solidFill>
+            <a:srgbClr val="B45309"/>
+          </a:solidFill>
+          <a:ln w="12700">
+            <a:solidFill>
+              <a:srgbClr val="B45309"/>
+            </a:solidFill>
+            <a:prstDash val="solid"/>
+          </a:ln>
+        </p:spPr>
+      </p:sp>
+      <p:pic>
+        <p:nvPicPr>
+          <p:cNvPr id="13" name="Image 1" descr="preencoded.png">    </p:cNvPr>
+          <p:cNvPicPr>
+            <a:picLocks noChangeAspect="1"/>
+          </p:cNvPicPr>
+          <p:nvPr/>
+        </p:nvPicPr>
+        <p:blipFill>
+          <a:blip r:embed="rId2"/>
+          <a:stretch>
+            <a:fillRect/>
+          </a:stretch>
+        </p:blipFill>
+        <p:spPr>
+          <a:xfrm>
+            <a:off x="8847404" y="128016"/>
+            <a:ext cx="201168" cy="201168"/>
+          </a:xfrm>
+          <a:prstGeom prst="rect">
+            <a:avLst/>
+          </a:prstGeom>
+        </p:spPr>
+      </p:pic>
+      <p:sp>
+        <p:nvSpPr>
+          <p:cNvPr id="14" name="Text 10"/>
+          <p:cNvSpPr txBox="1"/>
+          <p:nvPr/>
+        </p:nvSpPr>
+        <p:spPr>
+          <a:xfrm>
+            <a:off x="9103436" y="91440"/>
+            <a:ext cx="2503043" cy="274320"/>
+          </a:xfrm>
+          <a:prstGeom prst="rect">
+            <a:avLst/>
+          </a:prstGeom>
+          <a:noFill/>
+          <a:ln/>
+        </p:spPr>
+        <p:txBody>
+          <a:bodyPr wrap="square" lIns="0" tIns="0" rIns="0" bIns="0" rtlCol="0" anchor="ctr"/>
+          <a:lstStyle/>
+          <a:p>
+            <a:pPr indent="0" marL="0">
+              <a:buNone/>
+            </a:pPr>
+            <a:r>
+              <a:rPr lang="en-US" sz="1100" b="1" dirty="0">
+                <a:solidFill>
+                  <a:srgbClr val="92400E"/>
+                </a:solidFill>
+                <a:latin typeface="Calibri" pitchFamily="34" charset="0"/>
+                <a:ea typeface="Calibri" pitchFamily="34" charset="-122"/>
+                <a:cs typeface="Calibri" pitchFamily="34" charset="-120"/>
+              </a:rPr>
+              <a:t>USE NOW</a:t>
+            </a:r>
+            <a:pPr indent="0" marL="0">
+              <a:buNone/>
+            </a:pPr>
+            <a:r>
+              <a:rPr lang="en-US" sz="1100" dirty="0">
+                <a:solidFill>
+                  <a:srgbClr val="92400E"/>
+                </a:solidFill>
+                <a:latin typeface="Calibri" pitchFamily="34" charset="0"/>
+                <a:ea typeface="Calibri" pitchFamily="34" charset="-122"/>
+                <a:cs typeface="Calibri" pitchFamily="34" charset="-120"/>
+              </a:rPr>
+              <a:t> · bit masks</a:t>
+            </a:r>
+            <a:pPr indent="0" marL="0">
+              <a:buNone/>
+            </a:pPr>
+            <a:r>
+              <a:rPr lang="en-US" sz="1100" b="1" dirty="0">
+                <a:solidFill>
+                  <a:srgbClr val="92400E"/>
+                </a:solidFill>
+                <a:latin typeface="Calibri" pitchFamily="34" charset="0"/>
+                <a:ea typeface="Calibri" pitchFamily="34" charset="-122"/>
+                <a:cs typeface="Calibri" pitchFamily="34" charset="-120"/>
+              </a:rPr>
+              <a:t> → Lecture 08</a:t>
+            </a:r>
+            <a:endParaRPr lang="en-US" sz="1100" dirty="0"/>
+          </a:p>
+        </p:txBody>
+      </p:sp>
+      <p:sp>
+        <p:nvSpPr>
           <p:cNvPr id="25" name="Slide Number Placeholder 0"/>
           <p:cNvSpPr>
             <a:spLocks noGrp="1"/>
@@ -13005,6 +15069,158 @@
       </p:sp>
       <p:sp>
         <p:nvSpPr>
+          <p:cNvPr id="5" name="Shape 3"/>
+          <p:cNvSpPr/>
+          <p:nvPr/>
+        </p:nvSpPr>
+        <p:spPr>
+          <a:xfrm>
+            <a:off x="8959672" y="91440"/>
+            <a:ext cx="2683383" cy="274320"/>
+          </a:xfrm>
+          <a:prstGeom prst="rect">
+            <a:avLst/>
+          </a:prstGeom>
+          <a:solidFill>
+            <a:srgbClr val="FEF3C7"/>
+          </a:solidFill>
+          <a:ln w="12700">
+            <a:solidFill>
+              <a:srgbClr val="B45309"/>
+            </a:solidFill>
+            <a:prstDash val="solid"/>
+          </a:ln>
+        </p:spPr>
+      </p:sp>
+      <p:sp>
+        <p:nvSpPr>
+          <p:cNvPr id="6" name="Shape 4"/>
+          <p:cNvSpPr/>
+          <p:nvPr/>
+        </p:nvSpPr>
+        <p:spPr>
+          <a:xfrm>
+            <a:off x="8959672" y="91440"/>
+            <a:ext cx="27432" cy="274320"/>
+          </a:xfrm>
+          <a:prstGeom prst="rect">
+            <a:avLst/>
+          </a:prstGeom>
+          <a:solidFill>
+            <a:srgbClr val="B45309"/>
+          </a:solidFill>
+          <a:ln w="12700">
+            <a:solidFill>
+              <a:srgbClr val="B45309"/>
+            </a:solidFill>
+            <a:prstDash val="solid"/>
+          </a:ln>
+        </p:spPr>
+      </p:sp>
+      <p:sp>
+        <p:nvSpPr>
+          <p:cNvPr id="7" name="Shape 5"/>
+          <p:cNvSpPr/>
+          <p:nvPr/>
+        </p:nvSpPr>
+        <p:spPr>
+          <a:xfrm>
+            <a:off x="9014536" y="91440"/>
+            <a:ext cx="27432" cy="274320"/>
+          </a:xfrm>
+          <a:prstGeom prst="rect">
+            <a:avLst/>
+          </a:prstGeom>
+          <a:solidFill>
+            <a:srgbClr val="B45309"/>
+          </a:solidFill>
+          <a:ln w="12700">
+            <a:solidFill>
+              <a:srgbClr val="B45309"/>
+            </a:solidFill>
+            <a:prstDash val="solid"/>
+          </a:ln>
+        </p:spPr>
+      </p:sp>
+      <p:pic>
+        <p:nvPicPr>
+          <p:cNvPr id="8" name="Image 0" descr="preencoded.png">    </p:cNvPr>
+          <p:cNvPicPr>
+            <a:picLocks noChangeAspect="1"/>
+          </p:cNvPicPr>
+          <p:nvPr/>
+        </p:nvPicPr>
+        <p:blipFill>
+          <a:blip r:embed="rId1"/>
+          <a:stretch>
+            <a:fillRect/>
+          </a:stretch>
+        </p:blipFill>
+        <p:spPr>
+          <a:xfrm>
+            <a:off x="9087688" y="128016"/>
+            <a:ext cx="201168" cy="201168"/>
+          </a:xfrm>
+          <a:prstGeom prst="rect">
+            <a:avLst/>
+          </a:prstGeom>
+        </p:spPr>
+      </p:pic>
+      <p:sp>
+        <p:nvSpPr>
+          <p:cNvPr id="9" name="Text 6"/>
+          <p:cNvSpPr txBox="1"/>
+          <p:nvPr/>
+        </p:nvSpPr>
+        <p:spPr>
+          <a:xfrm>
+            <a:off x="9343720" y="91440"/>
+            <a:ext cx="2262759" cy="274320"/>
+          </a:xfrm>
+          <a:prstGeom prst="rect">
+            <a:avLst/>
+          </a:prstGeom>
+          <a:noFill/>
+          <a:ln/>
+        </p:spPr>
+        <p:txBody>
+          <a:bodyPr wrap="square" lIns="0" tIns="0" rIns="0" bIns="0" rtlCol="0" anchor="ctr"/>
+          <a:lstStyle/>
+          <a:p>
+            <a:pPr indent="0" marL="0">
+              <a:buNone/>
+            </a:pPr>
+            <a:r>
+              <a:rPr lang="en-US" sz="1100" b="1" dirty="0">
+                <a:solidFill>
+                  <a:srgbClr val="92400E"/>
+                </a:solidFill>
+                <a:latin typeface="Calibri" pitchFamily="34" charset="0"/>
+                <a:ea typeface="Calibri" pitchFamily="34" charset="-122"/>
+                <a:cs typeface="Calibri" pitchFamily="34" charset="-120"/>
+              </a:rPr>
+              <a:t>USE NOW</a:t>
+            </a:r>
+            <a:pPr indent="0" marL="0">
+              <a:buNone/>
+            </a:pPr>
+            <a:r>
+              <a:rPr lang="en-US" sz="1100" dirty="0">
+                <a:solidFill>
+                  <a:srgbClr val="92400E"/>
+                </a:solidFill>
+                <a:latin typeface="Calibri" pitchFamily="34" charset="0"/>
+                <a:ea typeface="Calibri" pitchFamily="34" charset="-122"/>
+                <a:cs typeface="Calibri" pitchFamily="34" charset="-120"/>
+              </a:rPr>
+              <a:t> · the complete program</a:t>
+            </a:r>
+            <a:endParaRPr lang="en-US" sz="1100" dirty="0"/>
+          </a:p>
+        </p:txBody>
+      </p:sp>
+      <p:sp>
+        <p:nvSpPr>
           <p:cNvPr id="25" name="Slide Number Placeholder 0"/>
           <p:cNvSpPr>
             <a:spLocks noGrp="1"/>
@@ -13682,6 +15898,158 @@
               <a:t>    call prg32_gfx_text8</a:t>
             </a:r>
             <a:endParaRPr lang="en-US" sz="1500" dirty="0"/>
+          </a:p>
+        </p:txBody>
+      </p:sp>
+      <p:sp>
+        <p:nvSpPr>
+          <p:cNvPr id="5" name="Shape 3"/>
+          <p:cNvSpPr/>
+          <p:nvPr/>
+        </p:nvSpPr>
+        <p:spPr>
+          <a:xfrm>
+            <a:off x="8959672" y="91440"/>
+            <a:ext cx="2683383" cy="274320"/>
+          </a:xfrm>
+          <a:prstGeom prst="rect">
+            <a:avLst/>
+          </a:prstGeom>
+          <a:solidFill>
+            <a:srgbClr val="FEF3C7"/>
+          </a:solidFill>
+          <a:ln w="12700">
+            <a:solidFill>
+              <a:srgbClr val="B45309"/>
+            </a:solidFill>
+            <a:prstDash val="solid"/>
+          </a:ln>
+        </p:spPr>
+      </p:sp>
+      <p:sp>
+        <p:nvSpPr>
+          <p:cNvPr id="6" name="Shape 4"/>
+          <p:cNvSpPr/>
+          <p:nvPr/>
+        </p:nvSpPr>
+        <p:spPr>
+          <a:xfrm>
+            <a:off x="8959672" y="91440"/>
+            <a:ext cx="27432" cy="274320"/>
+          </a:xfrm>
+          <a:prstGeom prst="rect">
+            <a:avLst/>
+          </a:prstGeom>
+          <a:solidFill>
+            <a:srgbClr val="B45309"/>
+          </a:solidFill>
+          <a:ln w="12700">
+            <a:solidFill>
+              <a:srgbClr val="B45309"/>
+            </a:solidFill>
+            <a:prstDash val="solid"/>
+          </a:ln>
+        </p:spPr>
+      </p:sp>
+      <p:sp>
+        <p:nvSpPr>
+          <p:cNvPr id="7" name="Shape 5"/>
+          <p:cNvSpPr/>
+          <p:nvPr/>
+        </p:nvSpPr>
+        <p:spPr>
+          <a:xfrm>
+            <a:off x="9014536" y="91440"/>
+            <a:ext cx="27432" cy="274320"/>
+          </a:xfrm>
+          <a:prstGeom prst="rect">
+            <a:avLst/>
+          </a:prstGeom>
+          <a:solidFill>
+            <a:srgbClr val="B45309"/>
+          </a:solidFill>
+          <a:ln w="12700">
+            <a:solidFill>
+              <a:srgbClr val="B45309"/>
+            </a:solidFill>
+            <a:prstDash val="solid"/>
+          </a:ln>
+        </p:spPr>
+      </p:sp>
+      <p:pic>
+        <p:nvPicPr>
+          <p:cNvPr id="8" name="Image 0" descr="preencoded.png">    </p:cNvPr>
+          <p:cNvPicPr>
+            <a:picLocks noChangeAspect="1"/>
+          </p:cNvPicPr>
+          <p:nvPr/>
+        </p:nvPicPr>
+        <p:blipFill>
+          <a:blip r:embed="rId1"/>
+          <a:stretch>
+            <a:fillRect/>
+          </a:stretch>
+        </p:blipFill>
+        <p:spPr>
+          <a:xfrm>
+            <a:off x="9087688" y="128016"/>
+            <a:ext cx="201168" cy="201168"/>
+          </a:xfrm>
+          <a:prstGeom prst="rect">
+            <a:avLst/>
+          </a:prstGeom>
+        </p:spPr>
+      </p:pic>
+      <p:sp>
+        <p:nvSpPr>
+          <p:cNvPr id="9" name="Text 6"/>
+          <p:cNvSpPr txBox="1"/>
+          <p:nvPr/>
+        </p:nvSpPr>
+        <p:spPr>
+          <a:xfrm>
+            <a:off x="9343720" y="91440"/>
+            <a:ext cx="2262759" cy="274320"/>
+          </a:xfrm>
+          <a:prstGeom prst="rect">
+            <a:avLst/>
+          </a:prstGeom>
+          <a:noFill/>
+          <a:ln/>
+        </p:spPr>
+        <p:txBody>
+          <a:bodyPr wrap="square" lIns="0" tIns="0" rIns="0" bIns="0" rtlCol="0" anchor="ctr"/>
+          <a:lstStyle/>
+          <a:p>
+            <a:pPr indent="0" marL="0">
+              <a:buNone/>
+            </a:pPr>
+            <a:r>
+              <a:rPr lang="en-US" sz="1100" b="1" dirty="0">
+                <a:solidFill>
+                  <a:srgbClr val="92400E"/>
+                </a:solidFill>
+                <a:latin typeface="Calibri" pitchFamily="34" charset="0"/>
+                <a:ea typeface="Calibri" pitchFamily="34" charset="-122"/>
+                <a:cs typeface="Calibri" pitchFamily="34" charset="-120"/>
+              </a:rPr>
+              <a:t>USE NOW</a:t>
+            </a:r>
+            <a:pPr indent="0" marL="0">
+              <a:buNone/>
+            </a:pPr>
+            <a:r>
+              <a:rPr lang="en-US" sz="1100" dirty="0">
+                <a:solidFill>
+                  <a:srgbClr val="92400E"/>
+                </a:solidFill>
+                <a:latin typeface="Calibri" pitchFamily="34" charset="0"/>
+                <a:ea typeface="Calibri" pitchFamily="34" charset="-122"/>
+                <a:cs typeface="Calibri" pitchFamily="34" charset="-120"/>
+              </a:rPr>
+              <a:t> · the complete program</a:t>
+            </a:r>
+            <a:endParaRPr lang="en-US" sz="1100" dirty="0"/>
           </a:p>
         </p:txBody>
       </p:sp>

--- a/en/slides/02-Computer_Architecture-First_Contact_with_RISC-V_Assembly-Code.pptx
+++ b/en/slides/02-Computer_Architecture-First_Contact_with_RISC-V_Assembly-Code.pptx
@@ -122,13 +122,13 @@
   <p:extLst>
     <p:ext uri="{521415D9-36F7-43E2-AB2F-B90AF26B5E84}">
       <p14:sectionLst xmlns:p14="http://schemas.microsoft.com/office/powerpoint/2010/main">
-        <p14:section name="Opening" id="{61a5aaac-a85b-c97b-b4e9-3c72e2d2cc2d}">
+        <p14:section name="Opening" id="{e66fc018-4526-f56e-0dbb-a1507d623a0e}">
           <p14:sldIdLst>
             <p14:sldId id="256"/>
             <p14:sldId id="257"/>
           </p14:sldIdLst>
         </p14:section>
-        <p14:section name="Your first cartridge" id="{e64e2bbb-0d49-49dd-15a9-b07832f80456}">
+        <p14:section name="Your first cartridge" id="{1ebd753c-8ec7-9cd0-9d40-6819af01c17b}">
           <p14:sldIdLst>
             <p14:sldId id="258"/>
             <p14:sldId id="259"/>
@@ -137,14 +137,14 @@
             <p14:sldId id="262"/>
           </p14:sldIdLst>
         </p14:section>
-        <p14:section name="The complete program" id="{ef79cb22-d387-df12-4681-28cb9eff6690}">
+        <p14:section name="The complete program" id="{0e46af14-31da-48d2-bb96-6b1aac119b98}">
           <p14:sldIdLst>
             <p14:sldId id="263"/>
             <p14:sldId id="264"/>
             <p14:sldId id="265"/>
           </p14:sldIdLst>
         </p14:section>
-        <p14:section name="Run it and test it" id="{bfb4ab95-bb89-6d79-876c-a4d04002b132}">
+        <p14:section name="Run it and test it" id="{fbb61f6c-de9b-f288-f362-393109cbb663}">
           <p14:sldIdLst>
             <p14:sldId id="266"/>
             <p14:sldId id="267"/>
@@ -153,7 +153,7 @@
             <p14:sldId id="270"/>
           </p14:sldIdLst>
         </p14:section>
-        <p14:section name="Exercises" id="{42465f99-28cf-102d-0984-daaaa7a17c67}">
+        <p14:section name="Exercises" id="{cbaacf77-e5ee-71f6-0839-301661ec896e}">
           <p14:sldIdLst>
             <p14:sldId id="271"/>
           </p14:sldIdLst>
